--- a/chapter1/clips/clip-02-types-of-datasets/clip.pptx
+++ b/chapter1/clips/clip-02-types-of-datasets/clip.pptx
@@ -11,9 +11,8 @@
     <p:sldId id="259" r:id="rId10"/>
     <p:sldId id="260" r:id="rId11"/>
     <p:sldId id="261" r:id="rId12"/>
-    <p:sldId id="262" r:id="rId13"/>
-    <p:sldId id="263" r:id="rId14"/>
-    <p:sldId id="264" r:id="rId15"/>
+    <p:sldId id="262" r:id="rId14"/>
+    <p:sldId id="263" r:id="rId15"/>
   </p:sldIdLst>
   <p:sldSz cx="12191695" cy="6858000" type="screen4x3"/>
   <p:notesSz cx="6858000" cy="9144000"/>
@@ -113,6 +112,436 @@
     </a:lvl9pPr>
   </p:defaultTextStyle>
 </p:presentation>
+</file>
+
+<file path=ppt/notesMasters/notesMaster1.xml><?xml version="1.0" encoding="utf-8"?>
+<p:notesMaster xmlns:a="http://schemas.openxmlformats.org/drawingml/2006/main" xmlns:p="http://schemas.openxmlformats.org/presentationml/2006/main" xmlns:r="http://schemas.openxmlformats.org/officeDocument/2006/relationships">
+  <p:cSld>
+    <p:bg>
+      <p:bgRef idx="1001">
+        <a:schemeClr val="bg1"/>
+      </p:bgRef>
+    </p:bg>
+    <p:spTree>
+      <p:nvGrpSpPr>
+        <p:cNvPr id="1" name=""/>
+        <p:cNvGrpSpPr/>
+        <p:nvPr/>
+      </p:nvGrpSpPr>
+      <p:grpSpPr>
+        <a:xfrm>
+          <a:off x="0" y="0"/>
+          <a:ext cx="0" cy="0"/>
+          <a:chOff x="0" y="0"/>
+          <a:chExt cx="0" cy="0"/>
+        </a:xfrm>
+      </p:grpSpPr>
+      <p:sp>
+        <p:nvSpPr>
+          <p:cNvPr id="2" name="Header Placeholder 1"/>
+          <p:cNvSpPr>
+            <a:spLocks noGrp="1"/>
+          </p:cNvSpPr>
+          <p:nvPr>
+            <p:ph type="hdr" sz="quarter"/>
+          </p:nvPr>
+        </p:nvSpPr>
+        <p:spPr>
+          <a:xfrm>
+            <a:off x="0" y="0"/>
+            <a:ext cx="2971800" cy="457200"/>
+          </a:xfrm>
+          <a:prstGeom prst="rect">
+            <a:avLst/>
+          </a:prstGeom>
+        </p:spPr>
+        <p:txBody>
+          <a:bodyPr vert="horz" lIns="91440" tIns="45720" rIns="91440" bIns="45720" rtlCol="0"/>
+          <a:lstStyle>
+            <a:lvl1pPr algn="l">
+              <a:defRPr sz="1200"/>
+            </a:lvl1pPr>
+          </a:lstStyle>
+          <a:p>
+            <a:endParaRPr lang="en-US"/>
+          </a:p>
+        </p:txBody>
+      </p:sp>
+      <p:sp>
+        <p:nvSpPr>
+          <p:cNvPr id="3" name="Date Placeholder 2"/>
+          <p:cNvSpPr>
+            <a:spLocks noGrp="1"/>
+          </p:cNvSpPr>
+          <p:nvPr>
+            <p:ph type="dt" idx="1"/>
+          </p:nvPr>
+        </p:nvSpPr>
+        <p:spPr>
+          <a:xfrm>
+            <a:off x="3884613" y="0"/>
+            <a:ext cx="2971800" cy="457200"/>
+          </a:xfrm>
+          <a:prstGeom prst="rect">
+            <a:avLst/>
+          </a:prstGeom>
+        </p:spPr>
+        <p:txBody>
+          <a:bodyPr vert="horz" lIns="91440" tIns="45720" rIns="91440" bIns="45720" rtlCol="0"/>
+          <a:lstStyle>
+            <a:lvl1pPr algn="r">
+              <a:defRPr sz="1200"/>
+            </a:lvl1pPr>
+          </a:lstStyle>
+          <a:p>
+            <a:fld id="{0F89C1C7-3DCD-1040-A9CF-14679D8B5DDD}" type="datetimeFigureOut">
+              <a:rPr lang="en-US" smtClean="0"/>
+              <a:t>10/17/16</a:t>
+            </a:fld>
+            <a:endParaRPr lang="en-US"/>
+          </a:p>
+        </p:txBody>
+      </p:sp>
+      <p:sp>
+        <p:nvSpPr>
+          <p:cNvPr id="4" name="Slide Image Placeholder 3"/>
+          <p:cNvSpPr>
+            <a:spLocks noGrp="1" noRot="1" noChangeAspect="1"/>
+          </p:cNvSpPr>
+          <p:nvPr>
+            <p:ph type="sldImg" idx="2"/>
+          </p:nvPr>
+        </p:nvSpPr>
+        <p:spPr>
+          <a:xfrm>
+            <a:off x="1143000" y="685800"/>
+            <a:ext cx="4572000" cy="3429000"/>
+          </a:xfrm>
+          <a:prstGeom prst="rect">
+            <a:avLst/>
+          </a:prstGeom>
+          <a:noFill/>
+          <a:ln w="12700">
+            <a:solidFill>
+              <a:prstClr val="black"/>
+            </a:solidFill>
+          </a:ln>
+        </p:spPr>
+        <p:txBody>
+          <a:bodyPr vert="horz" lIns="91440" tIns="45720" rIns="91440" bIns="45720" rtlCol="0" anchor="ctr"/>
+          <a:lstStyle/>
+          <a:p>
+            <a:endParaRPr lang="en-US"/>
+          </a:p>
+        </p:txBody>
+      </p:sp>
+      <p:sp>
+        <p:nvSpPr>
+          <p:cNvPr id="5" name="Notes Placeholder 4"/>
+          <p:cNvSpPr>
+            <a:spLocks noGrp="1"/>
+          </p:cNvSpPr>
+          <p:nvPr>
+            <p:ph type="body" sz="quarter" idx="3"/>
+          </p:nvPr>
+        </p:nvSpPr>
+        <p:spPr>
+          <a:xfrm>
+            <a:off x="685800" y="4343400"/>
+            <a:ext cx="5486400" cy="4114800"/>
+          </a:xfrm>
+          <a:prstGeom prst="rect">
+            <a:avLst/>
+          </a:prstGeom>
+        </p:spPr>
+        <p:txBody>
+          <a:bodyPr vert="horz" lIns="91440" tIns="45720" rIns="91440" bIns="45720" rtlCol="0"/>
+          <a:lstStyle/>
+          <a:p>
+            <a:pPr lvl="0"/>
+            <a:r>
+              <a:rPr lang="en-US" smtClean="0"/>
+              <a:t>Click to edit Master text styles</a:t>
+            </a:r>
+          </a:p>
+          <a:p>
+            <a:pPr lvl="1"/>
+            <a:r>
+              <a:rPr lang="en-US" smtClean="0"/>
+              <a:t>Second level</a:t>
+            </a:r>
+          </a:p>
+          <a:p>
+            <a:pPr lvl="2"/>
+            <a:r>
+              <a:rPr lang="en-US" smtClean="0"/>
+              <a:t>Third level</a:t>
+            </a:r>
+          </a:p>
+          <a:p>
+            <a:pPr lvl="3"/>
+            <a:r>
+              <a:rPr lang="en-US" smtClean="0"/>
+              <a:t>Fourth level</a:t>
+            </a:r>
+          </a:p>
+          <a:p>
+            <a:pPr lvl="4"/>
+            <a:r>
+              <a:rPr lang="en-US" smtClean="0"/>
+              <a:t>Fifth level</a:t>
+            </a:r>
+            <a:endParaRPr lang="en-US"/>
+          </a:p>
+        </p:txBody>
+      </p:sp>
+      <p:sp>
+        <p:nvSpPr>
+          <p:cNvPr id="6" name="Footer Placeholder 5"/>
+          <p:cNvSpPr>
+            <a:spLocks noGrp="1"/>
+          </p:cNvSpPr>
+          <p:nvPr>
+            <p:ph type="ftr" sz="quarter" idx="4"/>
+          </p:nvPr>
+        </p:nvSpPr>
+        <p:spPr>
+          <a:xfrm>
+            <a:off x="0" y="8685213"/>
+            <a:ext cx="2971800" cy="457200"/>
+          </a:xfrm>
+          <a:prstGeom prst="rect">
+            <a:avLst/>
+          </a:prstGeom>
+        </p:spPr>
+        <p:txBody>
+          <a:bodyPr vert="horz" lIns="91440" tIns="45720" rIns="91440" bIns="45720" rtlCol="0" anchor="b"/>
+          <a:lstStyle>
+            <a:lvl1pPr algn="l">
+              <a:defRPr sz="1200"/>
+            </a:lvl1pPr>
+          </a:lstStyle>
+          <a:p>
+            <a:endParaRPr lang="en-US"/>
+          </a:p>
+        </p:txBody>
+      </p:sp>
+      <p:sp>
+        <p:nvSpPr>
+          <p:cNvPr id="7" name="Slide Number Placeholder 6"/>
+          <p:cNvSpPr>
+            <a:spLocks noGrp="1"/>
+          </p:cNvSpPr>
+          <p:nvPr>
+            <p:ph type="sldNum" sz="quarter" idx="5"/>
+          </p:nvPr>
+        </p:nvSpPr>
+        <p:spPr>
+          <a:xfrm>
+            <a:off x="3884613" y="8685213"/>
+            <a:ext cx="2971800" cy="457200"/>
+          </a:xfrm>
+          <a:prstGeom prst="rect">
+            <a:avLst/>
+          </a:prstGeom>
+        </p:spPr>
+        <p:txBody>
+          <a:bodyPr vert="horz" lIns="91440" tIns="45720" rIns="91440" bIns="45720" rtlCol="0" anchor="b"/>
+          <a:lstStyle>
+            <a:lvl1pPr algn="r">
+              <a:defRPr sz="1200"/>
+            </a:lvl1pPr>
+          </a:lstStyle>
+          <a:p>
+            <a:fld id="{BB5E49A5-4136-284D-997B-48E1D791AD67}" type="slidenum">
+              <a:rPr lang="en-US" smtClean="0"/>
+              <a:t>‹#›</a:t>
+            </a:fld>
+            <a:endParaRPr lang="en-US"/>
+          </a:p>
+        </p:txBody>
+      </p:sp>
+    </p:spTree>
+    <p:extLst>
+      <p:ext uri="{BB962C8B-B14F-4D97-AF65-F5344CB8AC3E}">
+        <p14:creationId xmlns:p14="http://schemas.microsoft.com/office/powerpoint/2010/main" val="2623252185"/>
+      </p:ext>
+    </p:extLst>
+  </p:cSld>
+  <p:clrMap bg1="lt1" tx1="dk1" bg2="lt2" tx2="dk2" accent1="accent1" accent2="accent2" accent3="accent3" accent4="accent4" accent5="accent5" accent6="accent6" hlink="hlink" folHlink="folHlink"/>
+  <p:notesStyle>
+    <a:lvl1pPr marL="0" algn="l" defTabSz="457200" rtl="0" eaLnBrk="1" latinLnBrk="0" hangingPunct="1">
+      <a:defRPr sz="1200" kern="1200">
+        <a:solidFill>
+          <a:schemeClr val="tx1"/>
+        </a:solidFill>
+        <a:latin typeface="+mn-lt"/>
+        <a:ea typeface="+mn-ea"/>
+        <a:cs typeface="+mn-cs"/>
+      </a:defRPr>
+    </a:lvl1pPr>
+    <a:lvl2pPr marL="457200" algn="l" defTabSz="457200" rtl="0" eaLnBrk="1" latinLnBrk="0" hangingPunct="1">
+      <a:defRPr sz="1200" kern="1200">
+        <a:solidFill>
+          <a:schemeClr val="tx1"/>
+        </a:solidFill>
+        <a:latin typeface="+mn-lt"/>
+        <a:ea typeface="+mn-ea"/>
+        <a:cs typeface="+mn-cs"/>
+      </a:defRPr>
+    </a:lvl2pPr>
+    <a:lvl3pPr marL="914400" algn="l" defTabSz="457200" rtl="0" eaLnBrk="1" latinLnBrk="0" hangingPunct="1">
+      <a:defRPr sz="1200" kern="1200">
+        <a:solidFill>
+          <a:schemeClr val="tx1"/>
+        </a:solidFill>
+        <a:latin typeface="+mn-lt"/>
+        <a:ea typeface="+mn-ea"/>
+        <a:cs typeface="+mn-cs"/>
+      </a:defRPr>
+    </a:lvl3pPr>
+    <a:lvl4pPr marL="1371600" algn="l" defTabSz="457200" rtl="0" eaLnBrk="1" latinLnBrk="0" hangingPunct="1">
+      <a:defRPr sz="1200" kern="1200">
+        <a:solidFill>
+          <a:schemeClr val="tx1"/>
+        </a:solidFill>
+        <a:latin typeface="+mn-lt"/>
+        <a:ea typeface="+mn-ea"/>
+        <a:cs typeface="+mn-cs"/>
+      </a:defRPr>
+    </a:lvl4pPr>
+    <a:lvl5pPr marL="1828800" algn="l" defTabSz="457200" rtl="0" eaLnBrk="1" latinLnBrk="0" hangingPunct="1">
+      <a:defRPr sz="1200" kern="1200">
+        <a:solidFill>
+          <a:schemeClr val="tx1"/>
+        </a:solidFill>
+        <a:latin typeface="+mn-lt"/>
+        <a:ea typeface="+mn-ea"/>
+        <a:cs typeface="+mn-cs"/>
+      </a:defRPr>
+    </a:lvl5pPr>
+    <a:lvl6pPr marL="2286000" algn="l" defTabSz="457200" rtl="0" eaLnBrk="1" latinLnBrk="0" hangingPunct="1">
+      <a:defRPr sz="1200" kern="1200">
+        <a:solidFill>
+          <a:schemeClr val="tx1"/>
+        </a:solidFill>
+        <a:latin typeface="+mn-lt"/>
+        <a:ea typeface="+mn-ea"/>
+        <a:cs typeface="+mn-cs"/>
+      </a:defRPr>
+    </a:lvl6pPr>
+    <a:lvl7pPr marL="2743200" algn="l" defTabSz="457200" rtl="0" eaLnBrk="1" latinLnBrk="0" hangingPunct="1">
+      <a:defRPr sz="1200" kern="1200">
+        <a:solidFill>
+          <a:schemeClr val="tx1"/>
+        </a:solidFill>
+        <a:latin typeface="+mn-lt"/>
+        <a:ea typeface="+mn-ea"/>
+        <a:cs typeface="+mn-cs"/>
+      </a:defRPr>
+    </a:lvl7pPr>
+    <a:lvl8pPr marL="3200400" algn="l" defTabSz="457200" rtl="0" eaLnBrk="1" latinLnBrk="0" hangingPunct="1">
+      <a:defRPr sz="1200" kern="1200">
+        <a:solidFill>
+          <a:schemeClr val="tx1"/>
+        </a:solidFill>
+        <a:latin typeface="+mn-lt"/>
+        <a:ea typeface="+mn-ea"/>
+        <a:cs typeface="+mn-cs"/>
+      </a:defRPr>
+    </a:lvl8pPr>
+    <a:lvl9pPr marL="3657600" algn="l" defTabSz="457200" rtl="0" eaLnBrk="1" latinLnBrk="0" hangingPunct="1">
+      <a:defRPr sz="1200" kern="1200">
+        <a:solidFill>
+          <a:schemeClr val="tx1"/>
+        </a:solidFill>
+        <a:latin typeface="+mn-lt"/>
+        <a:ea typeface="+mn-ea"/>
+        <a:cs typeface="+mn-cs"/>
+      </a:defRPr>
+    </a:lvl9pPr>
+  </p:notesStyle>
+</p:notesMaster>
+</file>
+
+<file path=ppt/notesSlides/notesSlide1.xml><?xml version="1.0" encoding="utf-8"?>
+<p:notes xmlns:a="http://schemas.openxmlformats.org/drawingml/2006/main" xmlns:p="http://schemas.openxmlformats.org/presentationml/2006/main" xmlns:r="http://schemas.openxmlformats.org/officeDocument/2006/relationships">
+  <p:cSld>
+    <p:spTree>
+      <p:nvGrpSpPr>
+        <p:cNvPr id="1" name=""/>
+        <p:cNvGrpSpPr/>
+        <p:nvPr/>
+      </p:nvGrpSpPr>
+      <p:grpSpPr>
+        <a:xfrm>
+          <a:off x="0" y="0"/>
+          <a:ext cx="0" cy="0"/>
+          <a:chOff x="0" y="0"/>
+          <a:chExt cx="0" cy="0"/>
+        </a:xfrm>
+      </p:grpSpPr>
+      <p:sp>
+        <p:nvSpPr>
+          <p:cNvPr id="2" name="Slide Image Placeholder 1"/>
+          <p:cNvSpPr>
+            <a:spLocks noGrp="1"/>
+          </p:cNvSpPr>
+          <p:nvPr>
+            <p:ph type="sldImg" idx="2"/>
+          </p:nvPr>
+        </p:nvSpPr>
+        <p:spPr/>
+      </p:sp>
+      <p:sp>
+        <p:nvSpPr>
+          <p:cNvPr id="3" name="Notes Placeholder 2"/>
+          <p:cNvSpPr>
+            <a:spLocks noGrp="1"/>
+          </p:cNvSpPr>
+          <p:nvPr>
+            <p:ph type="body" idx="3" sz="quarter"/>
+          </p:nvPr>
+        </p:nvSpPr>
+        <p:spPr/>
+        <p:txBody>
+          <a:bodyPr/>
+          <a:lstStyle/>
+          <a:p>
+            <a:r>
+              <a:t>Flexible schema with tags or keys (JSON, XML, YAML)</a:t>
+            </a:r>
+          </a:p>
+          <a:p>
+            <a:r>
+              <a:t>Nested fields without a rigid relational table</a:t>
+            </a:r>
+          </a:p>
+          <a:p>
+            <a:r>
+              <a:t>Example 1.7: JSON objects with varying optional keys</a:t>
+            </a:r>
+          </a:p>
+        </p:txBody>
+      </p:sp>
+      <p:sp>
+        <p:nvSpPr>
+          <p:cNvPr id="4" name="Slide Number Placeholder 3"/>
+          <p:cNvSpPr>
+            <a:spLocks noGrp="1"/>
+          </p:cNvSpPr>
+          <p:nvPr>
+            <p:ph type="sldNum" idx="5" sz="quarter"/>
+          </p:nvPr>
+        </p:nvSpPr>
+        <p:spPr/>
+      </p:sp>
+    </p:spTree>
+  </p:cSld>
+  <p:clrMapOvr>
+    <a:masterClrMapping/>
+  </p:clrMapOvr>
+</p:notes>
 </file>
 
 <file path=ppt/slideLayouts/slideLayout1.xml><?xml version="1.0" encoding="utf-8"?>
@@ -3104,8 +3533,8 @@
         </p:nvSpPr>
         <p:spPr>
           <a:xfrm>
-            <a:off x="548640" y="320040"/>
-            <a:ext cx="11064240" cy="914400"/>
+            <a:off x="548640" y="1828800"/>
+            <a:ext cx="11064240" cy="2743200"/>
           </a:xfrm>
           <a:prstGeom prst="rect">
             <a:avLst/>
@@ -3113,16 +3542,46 @@
           <a:noFill/>
         </p:spPr>
         <p:txBody>
-          <a:bodyPr wrap="none">
-            <a:spAutoFit/>
+          <a:bodyPr wrap="square">
+            <a:noAutofit/>
           </a:bodyPr>
           <a:lstStyle/>
           <a:p>
-            <a:pPr>
-              <a:defRPr sz="3200" b="1"/>
+            <a:pPr algn="ctr">
+              <a:lnSpc>
+                <a:spcPts val="2200"/>
+              </a:lnSpc>
+              <a:spcAft>
+                <a:spcPts val="400"/>
+              </a:spcAft>
             </a:pPr>
             <a:r>
+              <a:rPr sz="4000" b="1">
+                <a:solidFill>
+                  <a:srgbClr val="1A1A2E"/>
+                </a:solidFill>
+                <a:latin typeface="Calibri"/>
+              </a:rPr>
               <a:t>Chapter 1 — Types of datasets</a:t>
+            </a:r>
+          </a:p>
+          <a:p>
+            <a:pPr algn="ctr">
+              <a:lnSpc>
+                <a:spcPts val="2200"/>
+              </a:lnSpc>
+              <a:spcBef>
+                <a:spcPts val="1400"/>
+              </a:spcBef>
+            </a:pPr>
+            <a:r>
+              <a:rPr sz="2600" b="0">
+                <a:solidFill>
+                  <a:srgbClr val="333333"/>
+                </a:solidFill>
+                <a:latin typeface="Calibri"/>
+              </a:rPr>
+              <a:t>Classify datasets by structure and temporal behavior</a:t>
             </a:r>
           </a:p>
         </p:txBody>
@@ -3135,8 +3594,8 @@
         </p:nvSpPr>
         <p:spPr>
           <a:xfrm>
-            <a:off x="731520" y="1280160"/>
-            <a:ext cx="10515600" cy="5029200"/>
+            <a:off x="548640" y="6355080"/>
+            <a:ext cx="11064240" cy="320040"/>
           </a:xfrm>
           <a:prstGeom prst="rect">
             <a:avLst/>
@@ -3145,15 +3604,23 @@
         </p:spPr>
         <p:txBody>
           <a:bodyPr wrap="square">
-            <a:spAutoFit/>
+            <a:noAutofit/>
           </a:bodyPr>
           <a:lstStyle/>
           <a:p>
-            <a:pPr>
-              <a:defRPr sz="2000"/>
+            <a:pPr algn="r">
+              <a:lnSpc>
+                <a:spcPts val="2200"/>
+              </a:lnSpc>
+              <a:defRPr sz="1000" b="0">
+                <a:solidFill>
+                  <a:srgbClr val="666666"/>
+                </a:solidFill>
+                <a:latin typeface="Calibri"/>
+              </a:defRPr>
             </a:pPr>
             <a:r>
-              <a:t>Classify datasets by structure and temporal behavior</a:t>
+              <a:t>Chapter 1 — Types Of Datasets</a:t>
             </a:r>
           </a:p>
         </p:txBody>
@@ -3184,8 +3651,8 @@
         </p:nvSpPr>
         <p:spPr>
           <a:xfrm>
-            <a:off x="548640" y="320040"/>
-            <a:ext cx="11064240" cy="914400"/>
+            <a:off x="548640" y="411480"/>
+            <a:ext cx="11064240" cy="777240"/>
           </a:xfrm>
           <a:prstGeom prst="rect">
             <a:avLst/>
@@ -3193,15 +3660,23 @@
           <a:noFill/>
         </p:spPr>
         <p:txBody>
-          <a:bodyPr wrap="none">
-            <a:spAutoFit/>
+          <a:bodyPr wrap="square">
+            <a:noAutofit/>
           </a:bodyPr>
           <a:lstStyle/>
           <a:p>
             <a:pPr>
-              <a:defRPr sz="3200" b="1"/>
+              <a:lnSpc>
+                <a:spcPts val="2200"/>
+              </a:lnSpc>
             </a:pPr>
             <a:r>
+              <a:rPr sz="2800" b="1">
+                <a:solidFill>
+                  <a:srgbClr val="1A1A2E"/>
+                </a:solidFill>
+                <a:latin typeface="Calibri"/>
+              </a:rPr>
               <a:t>Learning objectives</a:t>
             </a:r>
           </a:p>
@@ -3215,8 +3690,8 @@
         </p:nvSpPr>
         <p:spPr>
           <a:xfrm>
-            <a:off x="731520" y="1280160"/>
-            <a:ext cx="10515600" cy="5029200"/>
+            <a:off x="548640" y="1234440"/>
+            <a:ext cx="11064240" cy="4937760"/>
           </a:xfrm>
           <a:prstGeom prst="rect">
             <a:avLst/>
@@ -3225,31 +3700,141 @@
         </p:spPr>
         <p:txBody>
           <a:bodyPr wrap="square">
-            <a:spAutoFit/>
+            <a:noAutofit/>
           </a:bodyPr>
           <a:lstStyle/>
           <a:p>
             <a:pPr>
-              <a:defRPr sz="2000"/>
+              <a:lnSpc>
+                <a:spcPts val="2200"/>
+              </a:lnSpc>
+              <a:spcAft>
+                <a:spcPts val="1000"/>
+              </a:spcAft>
             </a:pPr>
             <a:r>
-              <a:t>Contrast structured, unstructured, and semi-structured data</a:t>
+              <a:rPr sz="2000" b="0">
+                <a:solidFill>
+                  <a:srgbClr val="333333"/>
+                </a:solidFill>
+                <a:latin typeface="Calibri"/>
+              </a:rPr>
+              <a:t>• Contrast structured, unstructured, and semi-</a:t>
             </a:r>
           </a:p>
           <a:p>
             <a:pPr>
-              <a:defRPr sz="2000"/>
+              <a:lnSpc>
+                <a:spcPts val="2200"/>
+              </a:lnSpc>
+              <a:spcAft>
+                <a:spcPts val="1000"/>
+              </a:spcAft>
             </a:pPr>
             <a:r>
-              <a:t>Give a typical format and example for each structural type</a:t>
+              <a:rPr sz="2000" b="0">
+                <a:solidFill>
+                  <a:srgbClr val="333333"/>
+                </a:solidFill>
+                <a:latin typeface="Calibri"/>
+              </a:rPr>
+              <a:t>      structured data</a:t>
             </a:r>
           </a:p>
           <a:p>
             <a:pPr>
-              <a:defRPr sz="2000"/>
+              <a:lnSpc>
+                <a:spcPts val="2200"/>
+              </a:lnSpc>
+              <a:spcAft>
+                <a:spcPts val="1000"/>
+              </a:spcAft>
             </a:pPr>
             <a:r>
-              <a:t>Distinguish static from dynamic datasets</a:t>
+              <a:rPr sz="2000" b="0">
+                <a:solidFill>
+                  <a:srgbClr val="333333"/>
+                </a:solidFill>
+                <a:latin typeface="Calibri"/>
+              </a:rPr>
+              <a:t>• Give a typical format and example for each</a:t>
+            </a:r>
+          </a:p>
+          <a:p>
+            <a:pPr>
+              <a:lnSpc>
+                <a:spcPts val="2200"/>
+              </a:lnSpc>
+              <a:spcAft>
+                <a:spcPts val="1000"/>
+              </a:spcAft>
+            </a:pPr>
+            <a:r>
+              <a:rPr sz="2000" b="0">
+                <a:solidFill>
+                  <a:srgbClr val="333333"/>
+                </a:solidFill>
+                <a:latin typeface="Calibri"/>
+              </a:rPr>
+              <a:t>      structural type</a:t>
+            </a:r>
+          </a:p>
+          <a:p>
+            <a:pPr>
+              <a:lnSpc>
+                <a:spcPts val="2200"/>
+              </a:lnSpc>
+              <a:spcAft>
+                <a:spcPts val="1000"/>
+              </a:spcAft>
+            </a:pPr>
+            <a:r>
+              <a:rPr sz="2000" b="0">
+                <a:solidFill>
+                  <a:srgbClr val="333333"/>
+                </a:solidFill>
+                <a:latin typeface="Calibri"/>
+              </a:rPr>
+              <a:t>• Distinguish static from dynamic datasets</a:t>
+            </a:r>
+          </a:p>
+        </p:txBody>
+      </p:sp>
+      <p:sp>
+        <p:nvSpPr>
+          <p:cNvPr id="4" name="TextBox 3"/>
+          <p:cNvSpPr txBox="1"/>
+          <p:nvPr/>
+        </p:nvSpPr>
+        <p:spPr>
+          <a:xfrm>
+            <a:off x="548640" y="6355080"/>
+            <a:ext cx="11064240" cy="320040"/>
+          </a:xfrm>
+          <a:prstGeom prst="rect">
+            <a:avLst/>
+          </a:prstGeom>
+          <a:noFill/>
+        </p:spPr>
+        <p:txBody>
+          <a:bodyPr wrap="square">
+            <a:noAutofit/>
+          </a:bodyPr>
+          <a:lstStyle/>
+          <a:p>
+            <a:pPr algn="r">
+              <a:lnSpc>
+                <a:spcPts val="2200"/>
+              </a:lnSpc>
+              <a:defRPr sz="1000" b="0">
+                <a:solidFill>
+                  <a:srgbClr val="666666"/>
+                </a:solidFill>
+                <a:latin typeface="Calibri"/>
+              </a:defRPr>
+            </a:pPr>
+            <a:r>
+              <a:t>Chapter 1 — Types Of Datasets</a:t>
             </a:r>
           </a:p>
         </p:txBody>
@@ -3280,8 +3865,8 @@
         </p:nvSpPr>
         <p:spPr>
           <a:xfrm>
-            <a:off x="548640" y="320040"/>
-            <a:ext cx="11064240" cy="914400"/>
+            <a:off x="548640" y="411480"/>
+            <a:ext cx="11064240" cy="777240"/>
           </a:xfrm>
           <a:prstGeom prst="rect">
             <a:avLst/>
@@ -3289,15 +3874,23 @@
           <a:noFill/>
         </p:spPr>
         <p:txBody>
-          <a:bodyPr wrap="none">
-            <a:spAutoFit/>
+          <a:bodyPr wrap="square">
+            <a:noAutofit/>
           </a:bodyPr>
           <a:lstStyle/>
           <a:p>
             <a:pPr>
-              <a:defRPr sz="3200" b="1"/>
+              <a:lnSpc>
+                <a:spcPts val="2200"/>
+              </a:lnSpc>
             </a:pPr>
             <a:r>
+              <a:rPr sz="2800" b="1">
+                <a:solidFill>
+                  <a:srgbClr val="1A1A2E"/>
+                </a:solidFill>
+                <a:latin typeface="Calibri"/>
+              </a:rPr>
               <a:t>Two classification axes</a:t>
             </a:r>
           </a:p>
@@ -3311,8 +3904,8 @@
         </p:nvSpPr>
         <p:spPr>
           <a:xfrm>
-            <a:off x="731520" y="1280160"/>
-            <a:ext cx="10515600" cy="5029200"/>
+            <a:off x="548640" y="1234440"/>
+            <a:ext cx="11064240" cy="4937760"/>
           </a:xfrm>
           <a:prstGeom prst="rect">
             <a:avLst/>
@@ -3321,39 +3914,196 @@
         </p:spPr>
         <p:txBody>
           <a:bodyPr wrap="square">
-            <a:spAutoFit/>
+            <a:noAutofit/>
           </a:bodyPr>
           <a:lstStyle/>
           <a:p>
             <a:pPr>
-              <a:defRPr sz="2000"/>
+              <a:lnSpc>
+                <a:spcPts val="2200"/>
+              </a:lnSpc>
+              <a:spcAft>
+                <a:spcPts val="1000"/>
+              </a:spcAft>
             </a:pPr>
             <a:r>
-              <a:t>**Structure:** structured / unstructured / semi-structured</a:t>
+              <a:rPr sz="2000" b="0">
+                <a:solidFill>
+                  <a:srgbClr val="333333"/>
+                </a:solidFill>
+                <a:latin typeface="Calibri"/>
+              </a:rPr>
+              <a:t>• </a:t>
+            </a:r>
+            <a:r>
+              <a:rPr sz="2000" b="1">
+                <a:solidFill>
+                  <a:srgbClr val="333333"/>
+                </a:solidFill>
+                <a:latin typeface="Calibri"/>
+              </a:rPr>
+              <a:t>Structure:</a:t>
+            </a:r>
+            <a:r>
+              <a:rPr sz="2000" b="0">
+                <a:solidFill>
+                  <a:srgbClr val="333333"/>
+                </a:solidFill>
+                <a:latin typeface="Calibri"/>
+              </a:rPr>
+              <a:t> structured / unstructured / semi-</a:t>
             </a:r>
           </a:p>
           <a:p>
             <a:pPr>
-              <a:defRPr sz="2000"/>
+              <a:lnSpc>
+                <a:spcPts val="2200"/>
+              </a:lnSpc>
+              <a:spcAft>
+                <a:spcPts val="1000"/>
+              </a:spcAft>
             </a:pPr>
             <a:r>
-              <a:t>**Temporal behavior:** static vs dynamic</a:t>
+              <a:rPr sz="2000" b="0">
+                <a:solidFill>
+                  <a:srgbClr val="333333"/>
+                </a:solidFill>
+                <a:latin typeface="Calibri"/>
+              </a:rPr>
+              <a:t>      structured</a:t>
             </a:r>
           </a:p>
           <a:p>
             <a:pPr>
-              <a:defRPr sz="2000"/>
+              <a:lnSpc>
+                <a:spcPts val="2200"/>
+              </a:lnSpc>
+              <a:spcAft>
+                <a:spcPts val="1000"/>
+              </a:spcAft>
             </a:pPr>
             <a:r>
-              <a:t>Structure affects how you store, query, and analyze</a:t>
+              <a:rPr sz="2000" b="0">
+                <a:solidFill>
+                  <a:srgbClr val="333333"/>
+                </a:solidFill>
+                <a:latin typeface="Calibri"/>
+              </a:rPr>
+              <a:t>• </a:t>
+            </a:r>
+            <a:r>
+              <a:rPr sz="2000" b="1">
+                <a:solidFill>
+                  <a:srgbClr val="333333"/>
+                </a:solidFill>
+                <a:latin typeface="Calibri"/>
+              </a:rPr>
+              <a:t>Temporal behavior:</a:t>
+            </a:r>
+            <a:r>
+              <a:rPr sz="2000" b="0">
+                <a:solidFill>
+                  <a:srgbClr val="333333"/>
+                </a:solidFill>
+                <a:latin typeface="Calibri"/>
+              </a:rPr>
+              <a:t> static vs dynamic</a:t>
             </a:r>
           </a:p>
           <a:p>
             <a:pPr>
-              <a:defRPr sz="2000"/>
+              <a:lnSpc>
+                <a:spcPts val="2200"/>
+              </a:lnSpc>
+              <a:spcAft>
+                <a:spcPts val="1000"/>
+              </a:spcAft>
             </a:pPr>
             <a:r>
-              <a:t>Choosing the right representation is a prerequisite for reliable analysis</a:t>
+              <a:rPr sz="2000" b="0">
+                <a:solidFill>
+                  <a:srgbClr val="333333"/>
+                </a:solidFill>
+                <a:latin typeface="Calibri"/>
+              </a:rPr>
+              <a:t>• Structure affects how you store, query, and analyze</a:t>
+            </a:r>
+          </a:p>
+          <a:p>
+            <a:pPr>
+              <a:lnSpc>
+                <a:spcPts val="2200"/>
+              </a:lnSpc>
+              <a:spcAft>
+                <a:spcPts val="1000"/>
+              </a:spcAft>
+            </a:pPr>
+            <a:r>
+              <a:rPr sz="2000" b="0">
+                <a:solidFill>
+                  <a:srgbClr val="333333"/>
+                </a:solidFill>
+                <a:latin typeface="Calibri"/>
+              </a:rPr>
+              <a:t>• Choosing the right representation is a prerequisite</a:t>
+            </a:r>
+          </a:p>
+          <a:p>
+            <a:pPr>
+              <a:lnSpc>
+                <a:spcPts val="2200"/>
+              </a:lnSpc>
+              <a:spcAft>
+                <a:spcPts val="1000"/>
+              </a:spcAft>
+            </a:pPr>
+            <a:r>
+              <a:rPr sz="2000" b="0">
+                <a:solidFill>
+                  <a:srgbClr val="333333"/>
+                </a:solidFill>
+                <a:latin typeface="Calibri"/>
+              </a:rPr>
+              <a:t>      for reliable analysis</a:t>
+            </a:r>
+          </a:p>
+        </p:txBody>
+      </p:sp>
+      <p:sp>
+        <p:nvSpPr>
+          <p:cNvPr id="4" name="TextBox 3"/>
+          <p:cNvSpPr txBox="1"/>
+          <p:nvPr/>
+        </p:nvSpPr>
+        <p:spPr>
+          <a:xfrm>
+            <a:off x="548640" y="6355080"/>
+            <a:ext cx="11064240" cy="320040"/>
+          </a:xfrm>
+          <a:prstGeom prst="rect">
+            <a:avLst/>
+          </a:prstGeom>
+          <a:noFill/>
+        </p:spPr>
+        <p:txBody>
+          <a:bodyPr wrap="square">
+            <a:noAutofit/>
+          </a:bodyPr>
+          <a:lstStyle/>
+          <a:p>
+            <a:pPr algn="r">
+              <a:lnSpc>
+                <a:spcPts val="2200"/>
+              </a:lnSpc>
+              <a:defRPr sz="1000" b="0">
+                <a:solidFill>
+                  <a:srgbClr val="666666"/>
+                </a:solidFill>
+                <a:latin typeface="Calibri"/>
+              </a:defRPr>
+            </a:pPr>
+            <a:r>
+              <a:t>Chapter 1 — Types Of Datasets</a:t>
             </a:r>
           </a:p>
         </p:txBody>
@@ -3384,8 +4134,8 @@
         </p:nvSpPr>
         <p:spPr>
           <a:xfrm>
-            <a:off x="548640" y="320040"/>
-            <a:ext cx="11064240" cy="914400"/>
+            <a:off x="548640" y="411480"/>
+            <a:ext cx="11064240" cy="777240"/>
           </a:xfrm>
           <a:prstGeom prst="rect">
             <a:avLst/>
@@ -3393,15 +4143,23 @@
           <a:noFill/>
         </p:spPr>
         <p:txBody>
-          <a:bodyPr wrap="none">
-            <a:spAutoFit/>
+          <a:bodyPr wrap="square">
+            <a:noAutofit/>
           </a:bodyPr>
           <a:lstStyle/>
           <a:p>
             <a:pPr>
-              <a:defRPr sz="3200" b="1"/>
+              <a:lnSpc>
+                <a:spcPts val="2200"/>
+              </a:lnSpc>
             </a:pPr>
             <a:r>
+              <a:rPr sz="2800" b="1">
+                <a:solidFill>
+                  <a:srgbClr val="1A1A2E"/>
+                </a:solidFill>
+                <a:latin typeface="Calibri"/>
+              </a:rPr>
               <a:t>Structured datasets</a:t>
             </a:r>
           </a:p>
@@ -3415,8 +4173,8 @@
         </p:nvSpPr>
         <p:spPr>
           <a:xfrm>
-            <a:off x="731520" y="1280160"/>
-            <a:ext cx="10515600" cy="5029200"/>
+            <a:off x="548640" y="1234440"/>
+            <a:ext cx="11064240" cy="4937760"/>
           </a:xfrm>
           <a:prstGeom prst="rect">
             <a:avLst/>
@@ -3425,39 +4183,122 @@
         </p:spPr>
         <p:txBody>
           <a:bodyPr wrap="square">
-            <a:spAutoFit/>
+            <a:noAutofit/>
           </a:bodyPr>
           <a:lstStyle/>
           <a:p>
             <a:pPr>
-              <a:defRPr sz="2000"/>
+              <a:lnSpc>
+                <a:spcPts val="2200"/>
+              </a:lnSpc>
+              <a:spcAft>
+                <a:spcPts val="1000"/>
+              </a:spcAft>
             </a:pPr>
             <a:r>
-              <a:t>Fixed schema: rows and columns, consistent types</a:t>
+              <a:rPr sz="2000" b="0">
+                <a:solidFill>
+                  <a:srgbClr val="333333"/>
+                </a:solidFill>
+                <a:latin typeface="Calibri"/>
+              </a:rPr>
+              <a:t>• Fixed schema: rows and columns, consistent types</a:t>
             </a:r>
           </a:p>
           <a:p>
             <a:pPr>
-              <a:defRPr sz="2000"/>
+              <a:lnSpc>
+                <a:spcPts val="2200"/>
+              </a:lnSpc>
+              <a:spcAft>
+                <a:spcPts val="1000"/>
+              </a:spcAft>
             </a:pPr>
             <a:r>
-              <a:t>Common stores: spreadsheets, relational tables, CSV</a:t>
+              <a:rPr sz="2000" b="0">
+                <a:solidFill>
+                  <a:srgbClr val="333333"/>
+                </a:solidFill>
+                <a:latin typeface="Calibri"/>
+              </a:rPr>
+              <a:t>• Common stores: spreadsheets, relational tables, CSV</a:t>
             </a:r>
           </a:p>
           <a:p>
             <a:pPr>
-              <a:defRPr sz="2000"/>
+              <a:lnSpc>
+                <a:spcPts val="2200"/>
+              </a:lnSpc>
+              <a:spcAft>
+                <a:spcPts val="1000"/>
+              </a:spcAft>
             </a:pPr>
             <a:r>
-              <a:t>Easy to filter, join, and aggregate</a:t>
+              <a:rPr sz="2000" b="0">
+                <a:solidFill>
+                  <a:srgbClr val="333333"/>
+                </a:solidFill>
+                <a:latin typeface="Calibri"/>
+              </a:rPr>
+              <a:t>• Easy to filter, join, and aggregate</a:t>
             </a:r>
           </a:p>
           <a:p>
             <a:pPr>
-              <a:defRPr sz="2000"/>
+              <a:lnSpc>
+                <a:spcPts val="2200"/>
+              </a:lnSpc>
+              <a:spcAft>
+                <a:spcPts val="1000"/>
+              </a:spcAft>
             </a:pPr>
             <a:r>
-              <a:t>Example: customer table (ID, Name, Email, …)</a:t>
+              <a:rPr sz="2000" b="0">
+                <a:solidFill>
+                  <a:srgbClr val="333333"/>
+                </a:solidFill>
+                <a:latin typeface="Calibri"/>
+              </a:rPr>
+              <a:t>• Example: customer table (ID, Name, Email, …)</a:t>
+            </a:r>
+          </a:p>
+        </p:txBody>
+      </p:sp>
+      <p:sp>
+        <p:nvSpPr>
+          <p:cNvPr id="4" name="TextBox 3"/>
+          <p:cNvSpPr txBox="1"/>
+          <p:nvPr/>
+        </p:nvSpPr>
+        <p:spPr>
+          <a:xfrm>
+            <a:off x="548640" y="6355080"/>
+            <a:ext cx="11064240" cy="320040"/>
+          </a:xfrm>
+          <a:prstGeom prst="rect">
+            <a:avLst/>
+          </a:prstGeom>
+          <a:noFill/>
+        </p:spPr>
+        <p:txBody>
+          <a:bodyPr wrap="square">
+            <a:noAutofit/>
+          </a:bodyPr>
+          <a:lstStyle/>
+          <a:p>
+            <a:pPr algn="r">
+              <a:lnSpc>
+                <a:spcPts val="2200"/>
+              </a:lnSpc>
+              <a:defRPr sz="1000" b="0">
+                <a:solidFill>
+                  <a:srgbClr val="666666"/>
+                </a:solidFill>
+                <a:latin typeface="Calibri"/>
+              </a:defRPr>
+            </a:pPr>
+            <a:r>
+              <a:t>Chapter 1 — Types Of Datasets</a:t>
             </a:r>
           </a:p>
         </p:txBody>
@@ -3488,8 +4329,8 @@
         </p:nvSpPr>
         <p:spPr>
           <a:xfrm>
-            <a:off x="548640" y="320040"/>
-            <a:ext cx="11064240" cy="914400"/>
+            <a:off x="548640" y="411480"/>
+            <a:ext cx="11064240" cy="777240"/>
           </a:xfrm>
           <a:prstGeom prst="rect">
             <a:avLst/>
@@ -3497,15 +4338,23 @@
           <a:noFill/>
         </p:spPr>
         <p:txBody>
-          <a:bodyPr wrap="none">
-            <a:spAutoFit/>
+          <a:bodyPr wrap="square">
+            <a:noAutofit/>
           </a:bodyPr>
           <a:lstStyle/>
           <a:p>
             <a:pPr>
-              <a:defRPr sz="3200" b="1"/>
+              <a:lnSpc>
+                <a:spcPts val="2200"/>
+              </a:lnSpc>
             </a:pPr>
             <a:r>
+              <a:rPr sz="2800" b="1">
+                <a:solidFill>
+                  <a:srgbClr val="1A1A2E"/>
+                </a:solidFill>
+                <a:latin typeface="Calibri"/>
+              </a:rPr>
               <a:t>Unstructured datasets</a:t>
             </a:r>
           </a:p>
@@ -3519,8 +4368,8 @@
         </p:nvSpPr>
         <p:spPr>
           <a:xfrm>
-            <a:off x="731520" y="1280160"/>
-            <a:ext cx="10515600" cy="5029200"/>
+            <a:off x="548640" y="1234440"/>
+            <a:ext cx="11064240" cy="4937760"/>
           </a:xfrm>
           <a:prstGeom prst="rect">
             <a:avLst/>
@@ -3529,39 +4378,122 @@
         </p:spPr>
         <p:txBody>
           <a:bodyPr wrap="square">
-            <a:spAutoFit/>
+            <a:noAutofit/>
           </a:bodyPr>
           <a:lstStyle/>
           <a:p>
             <a:pPr>
-              <a:defRPr sz="2000"/>
+              <a:lnSpc>
+                <a:spcPts val="2200"/>
+              </a:lnSpc>
+              <a:spcAft>
+                <a:spcPts val="1000"/>
+              </a:spcAft>
             </a:pPr>
             <a:r>
-              <a:t>No fixed row–column schema</a:t>
+              <a:rPr sz="2000" b="0">
+                <a:solidFill>
+                  <a:srgbClr val="333333"/>
+                </a:solidFill>
+                <a:latin typeface="Calibri"/>
+              </a:rPr>
+              <a:t>• No fixed row–column schema</a:t>
             </a:r>
           </a:p>
           <a:p>
             <a:pPr>
-              <a:defRPr sz="2000"/>
+              <a:lnSpc>
+                <a:spcPts val="2200"/>
+              </a:lnSpc>
+              <a:spcAft>
+                <a:spcPts val="1000"/>
+              </a:spcAft>
             </a:pPr>
             <a:r>
-              <a:t>Text, images, audio, video</a:t>
+              <a:rPr sz="2000" b="0">
+                <a:solidFill>
+                  <a:srgbClr val="333333"/>
+                </a:solidFill>
+                <a:latin typeface="Calibri"/>
+              </a:rPr>
+              <a:t>• Text, images, audio, video</a:t>
             </a:r>
           </a:p>
           <a:p>
             <a:pPr>
-              <a:defRPr sz="2000"/>
+              <a:lnSpc>
+                <a:spcPts val="2200"/>
+              </a:lnSpc>
+              <a:spcAft>
+                <a:spcPts val="1000"/>
+              </a:spcAft>
             </a:pPr>
             <a:r>
-              <a:t>Insights often need NLP or computer vision</a:t>
+              <a:rPr sz="2000" b="0">
+                <a:solidFill>
+                  <a:srgbClr val="333333"/>
+                </a:solidFill>
+                <a:latin typeface="Calibri"/>
+              </a:rPr>
+              <a:t>• Insights often need NLP or computer vision</a:t>
             </a:r>
           </a:p>
           <a:p>
             <a:pPr>
-              <a:defRPr sz="2000"/>
+              <a:lnSpc>
+                <a:spcPts val="2200"/>
+              </a:lnSpc>
+              <a:spcAft>
+                <a:spcPts val="1000"/>
+              </a:spcAft>
             </a:pPr>
             <a:r>
-              <a:t>Example: social posts, X-rays, voice recordings</a:t>
+              <a:rPr sz="2000" b="0">
+                <a:solidFill>
+                  <a:srgbClr val="333333"/>
+                </a:solidFill>
+                <a:latin typeface="Calibri"/>
+              </a:rPr>
+              <a:t>• Example: social posts, X-rays, voice recordings</a:t>
+            </a:r>
+          </a:p>
+        </p:txBody>
+      </p:sp>
+      <p:sp>
+        <p:nvSpPr>
+          <p:cNvPr id="4" name="TextBox 3"/>
+          <p:cNvSpPr txBox="1"/>
+          <p:nvPr/>
+        </p:nvSpPr>
+        <p:spPr>
+          <a:xfrm>
+            <a:off x="548640" y="6355080"/>
+            <a:ext cx="11064240" cy="320040"/>
+          </a:xfrm>
+          <a:prstGeom prst="rect">
+            <a:avLst/>
+          </a:prstGeom>
+          <a:noFill/>
+        </p:spPr>
+        <p:txBody>
+          <a:bodyPr wrap="square">
+            <a:noAutofit/>
+          </a:bodyPr>
+          <a:lstStyle/>
+          <a:p>
+            <a:pPr algn="r">
+              <a:lnSpc>
+                <a:spcPts val="2200"/>
+              </a:lnSpc>
+              <a:defRPr sz="1000" b="0">
+                <a:solidFill>
+                  <a:srgbClr val="666666"/>
+                </a:solidFill>
+                <a:latin typeface="Calibri"/>
+              </a:defRPr>
+            </a:pPr>
+            <a:r>
+              <a:t>Chapter 1 — Types Of Datasets</a:t>
             </a:r>
           </a:p>
         </p:txBody>
@@ -3592,8 +4524,8 @@
         </p:nvSpPr>
         <p:spPr>
           <a:xfrm>
-            <a:off x="548640" y="320040"/>
-            <a:ext cx="11064240" cy="914400"/>
+            <a:off x="548640" y="411480"/>
+            <a:ext cx="11064240" cy="777240"/>
           </a:xfrm>
           <a:prstGeom prst="rect">
             <a:avLst/>
@@ -3601,15 +4533,23 @@
           <a:noFill/>
         </p:spPr>
         <p:txBody>
-          <a:bodyPr wrap="none">
-            <a:spAutoFit/>
+          <a:bodyPr wrap="square">
+            <a:noAutofit/>
           </a:bodyPr>
           <a:lstStyle/>
           <a:p>
             <a:pPr>
-              <a:defRPr sz="3200" b="1"/>
+              <a:lnSpc>
+                <a:spcPts val="2200"/>
+              </a:lnSpc>
             </a:pPr>
             <a:r>
+              <a:rPr sz="2800" b="1">
+                <a:solidFill>
+                  <a:srgbClr val="1A1A2E"/>
+                </a:solidFill>
+                <a:latin typeface="Calibri"/>
+              </a:rPr>
               <a:t>Semi-structured datasets</a:t>
             </a:r>
           </a:p>
@@ -3623,8 +4563,52 @@
         </p:nvSpPr>
         <p:spPr>
           <a:xfrm>
-            <a:off x="731520" y="1280160"/>
-            <a:ext cx="10515600" cy="5029200"/>
+            <a:off x="548640" y="1051560"/>
+            <a:ext cx="11064240" cy="914400"/>
+          </a:xfrm>
+          <a:prstGeom prst="rect">
+            <a:avLst/>
+          </a:prstGeom>
+          <a:solidFill>
+            <a:srgbClr val="F4F4F4"/>
+          </a:solidFill>
+        </p:spPr>
+        <p:txBody>
+          <a:bodyPr wrap="square">
+            <a:noAutofit/>
+          </a:bodyPr>
+          <a:lstStyle/>
+          <a:p>
+            <a:pPr>
+              <a:lnSpc>
+                <a:spcPts val="2200"/>
+              </a:lnSpc>
+              <a:spcAft>
+                <a:spcPts val="200"/>
+              </a:spcAft>
+            </a:pPr>
+            <a:r>
+              <a:rPr sz="2000" b="0">
+                <a:solidFill>
+                  <a:srgbClr val="333333"/>
+                </a:solidFill>
+                <a:latin typeface="Consolas"/>
+              </a:rPr>
+              <a:t>$ cd modules/chapter1/example7/ &amp;&amp; bash run.sh</a:t>
+            </a:r>
+          </a:p>
+        </p:txBody>
+      </p:sp>
+      <p:sp>
+        <p:nvSpPr>
+          <p:cNvPr id="4" name="TextBox 3"/>
+          <p:cNvSpPr txBox="1"/>
+          <p:nvPr/>
+        </p:nvSpPr>
+        <p:spPr>
+          <a:xfrm>
+            <a:off x="548640" y="6355080"/>
+            <a:ext cx="11064240" cy="320040"/>
           </a:xfrm>
           <a:prstGeom prst="rect">
             <a:avLst/>
@@ -3633,39 +4617,23 @@
         </p:spPr>
         <p:txBody>
           <a:bodyPr wrap="square">
-            <a:spAutoFit/>
+            <a:noAutofit/>
           </a:bodyPr>
           <a:lstStyle/>
           <a:p>
-            <a:pPr>
-              <a:defRPr sz="2000"/>
+            <a:pPr algn="r">
+              <a:lnSpc>
+                <a:spcPts val="2200"/>
+              </a:lnSpc>
+              <a:defRPr sz="1000" b="0">
+                <a:solidFill>
+                  <a:srgbClr val="666666"/>
+                </a:solidFill>
+                <a:latin typeface="Calibri"/>
+              </a:defRPr>
             </a:pPr>
             <a:r>
-              <a:t>Flexible schema with tags or keys (JSON, XML, YAML)</a:t>
-            </a:r>
-          </a:p>
-          <a:p>
-            <a:pPr>
-              <a:defRPr sz="2000"/>
-            </a:pPr>
-            <a:r>
-              <a:t>Nested fields without a rigid relational table</a:t>
-            </a:r>
-          </a:p>
-          <a:p>
-            <a:pPr>
-              <a:defRPr sz="2000"/>
-            </a:pPr>
-            <a:r>
-              <a:t>Example 1.7: JSON objects with varying optional keys</a:t>
-            </a:r>
-          </a:p>
-          <a:p>
-            <a:pPr>
-              <a:defRPr sz="2000"/>
-            </a:pPr>
-            <a:r>
-              <a:t>Try it: `modules/chapter1/example7/`</a:t>
+              <a:t>Chapter 1 — Types Of Datasets</a:t>
             </a:r>
           </a:p>
         </p:txBody>
@@ -3696,8 +4664,8 @@
         </p:nvSpPr>
         <p:spPr>
           <a:xfrm>
-            <a:off x="548640" y="320040"/>
-            <a:ext cx="11064240" cy="914400"/>
+            <a:off x="548640" y="411480"/>
+            <a:ext cx="11064240" cy="777240"/>
           </a:xfrm>
           <a:prstGeom prst="rect">
             <a:avLst/>
@@ -3705,15 +4673,23 @@
           <a:noFill/>
         </p:spPr>
         <p:txBody>
-          <a:bodyPr wrap="none">
-            <a:spAutoFit/>
+          <a:bodyPr wrap="square">
+            <a:noAutofit/>
           </a:bodyPr>
           <a:lstStyle/>
           <a:p>
             <a:pPr>
-              <a:defRPr sz="3200" b="1"/>
+              <a:lnSpc>
+                <a:spcPts val="2200"/>
+              </a:lnSpc>
             </a:pPr>
             <a:r>
+              <a:rPr sz="2800" b="1">
+                <a:solidFill>
+                  <a:srgbClr val="1A1A2E"/>
+                </a:solidFill>
+                <a:latin typeface="Calibri"/>
+              </a:rPr>
               <a:t>Static vs dynamic</a:t>
             </a:r>
           </a:p>
@@ -3727,8 +4703,8 @@
         </p:nvSpPr>
         <p:spPr>
           <a:xfrm>
-            <a:off x="731520" y="1280160"/>
-            <a:ext cx="10515600" cy="5029200"/>
+            <a:off x="548640" y="1234440"/>
+            <a:ext cx="11064240" cy="4937760"/>
           </a:xfrm>
           <a:prstGeom prst="rect">
             <a:avLst/>
@@ -3737,39 +4713,234 @@
         </p:spPr>
         <p:txBody>
           <a:bodyPr wrap="square">
-            <a:spAutoFit/>
+            <a:noAutofit/>
           </a:bodyPr>
           <a:lstStyle/>
           <a:p>
             <a:pPr>
-              <a:defRPr sz="2000"/>
+              <a:lnSpc>
+                <a:spcPts val="2200"/>
+              </a:lnSpc>
+              <a:spcAft>
+                <a:spcPts val="1000"/>
+              </a:spcAft>
             </a:pPr>
             <a:r>
-              <a:t>**Static:** snapshot that changes rarely (archive census extract)</a:t>
+              <a:rPr sz="2000" b="0">
+                <a:solidFill>
+                  <a:srgbClr val="333333"/>
+                </a:solidFill>
+                <a:latin typeface="Calibri"/>
+              </a:rPr>
+              <a:t>• </a:t>
+            </a:r>
+            <a:r>
+              <a:rPr sz="2000" b="1">
+                <a:solidFill>
+                  <a:srgbClr val="333333"/>
+                </a:solidFill>
+                <a:latin typeface="Calibri"/>
+              </a:rPr>
+              <a:t>Static:</a:t>
+            </a:r>
+            <a:r>
+              <a:rPr sz="2000" b="0">
+                <a:solidFill>
+                  <a:srgbClr val="333333"/>
+                </a:solidFill>
+                <a:latin typeface="Calibri"/>
+              </a:rPr>
+              <a:t> snapshot that changes rarely (archive census</a:t>
             </a:r>
           </a:p>
           <a:p>
             <a:pPr>
-              <a:defRPr sz="2000"/>
+              <a:lnSpc>
+                <a:spcPts val="2200"/>
+              </a:lnSpc>
+              <a:spcAft>
+                <a:spcPts val="1000"/>
+              </a:spcAft>
             </a:pPr>
             <a:r>
-              <a:t>**Dynamic:** updates continuously (sensor streams, click logs)</a:t>
+              <a:rPr sz="2000" b="0">
+                <a:solidFill>
+                  <a:srgbClr val="333333"/>
+                </a:solidFill>
+                <a:latin typeface="Calibri"/>
+              </a:rPr>
+              <a:t>      extract)</a:t>
             </a:r>
           </a:p>
           <a:p>
             <a:pPr>
-              <a:defRPr sz="2000"/>
+              <a:lnSpc>
+                <a:spcPts val="2200"/>
+              </a:lnSpc>
+              <a:spcAft>
+                <a:spcPts val="1000"/>
+              </a:spcAft>
             </a:pPr>
             <a:r>
-              <a:t>Same entity can appear in both forms over its lifecycle</a:t>
+              <a:rPr sz="2000" b="0">
+                <a:solidFill>
+                  <a:srgbClr val="333333"/>
+                </a:solidFill>
+                <a:latin typeface="Calibri"/>
+              </a:rPr>
+              <a:t>• </a:t>
+            </a:r>
+            <a:r>
+              <a:rPr sz="2000" b="1">
+                <a:solidFill>
+                  <a:srgbClr val="333333"/>
+                </a:solidFill>
+                <a:latin typeface="Calibri"/>
+              </a:rPr>
+              <a:t>Dynamic:</a:t>
+            </a:r>
+            <a:r>
+              <a:rPr sz="2000" b="0">
+                <a:solidFill>
+                  <a:srgbClr val="333333"/>
+                </a:solidFill>
+                <a:latin typeface="Calibri"/>
+              </a:rPr>
+              <a:t> updates continuously (sensor streams, click</a:t>
             </a:r>
           </a:p>
           <a:p>
             <a:pPr>
-              <a:defRPr sz="2000"/>
+              <a:lnSpc>
+                <a:spcPts val="2200"/>
+              </a:lnSpc>
+              <a:spcAft>
+                <a:spcPts val="1000"/>
+              </a:spcAft>
             </a:pPr>
             <a:r>
-              <a:t>Temporal behavior drives refresh, versioning, and monitoring needs</a:t>
+              <a:rPr sz="2000" b="0">
+                <a:solidFill>
+                  <a:srgbClr val="333333"/>
+                </a:solidFill>
+                <a:latin typeface="Calibri"/>
+              </a:rPr>
+              <a:t>      logs)</a:t>
+            </a:r>
+          </a:p>
+          <a:p>
+            <a:pPr>
+              <a:lnSpc>
+                <a:spcPts val="2200"/>
+              </a:lnSpc>
+              <a:spcAft>
+                <a:spcPts val="1000"/>
+              </a:spcAft>
+            </a:pPr>
+            <a:r>
+              <a:rPr sz="2000" b="0">
+                <a:solidFill>
+                  <a:srgbClr val="333333"/>
+                </a:solidFill>
+                <a:latin typeface="Calibri"/>
+              </a:rPr>
+              <a:t>• Same entity can appear in both forms over its</a:t>
+            </a:r>
+          </a:p>
+          <a:p>
+            <a:pPr>
+              <a:lnSpc>
+                <a:spcPts val="2200"/>
+              </a:lnSpc>
+              <a:spcAft>
+                <a:spcPts val="1000"/>
+              </a:spcAft>
+            </a:pPr>
+            <a:r>
+              <a:rPr sz="2000" b="0">
+                <a:solidFill>
+                  <a:srgbClr val="333333"/>
+                </a:solidFill>
+                <a:latin typeface="Calibri"/>
+              </a:rPr>
+              <a:t>      lifecycle</a:t>
+            </a:r>
+          </a:p>
+          <a:p>
+            <a:pPr>
+              <a:lnSpc>
+                <a:spcPts val="2200"/>
+              </a:lnSpc>
+              <a:spcAft>
+                <a:spcPts val="1000"/>
+              </a:spcAft>
+            </a:pPr>
+            <a:r>
+              <a:rPr sz="2000" b="0">
+                <a:solidFill>
+                  <a:srgbClr val="333333"/>
+                </a:solidFill>
+                <a:latin typeface="Calibri"/>
+              </a:rPr>
+              <a:t>• Temporal behavior drives refresh, versioning, and</a:t>
+            </a:r>
+          </a:p>
+          <a:p>
+            <a:pPr>
+              <a:lnSpc>
+                <a:spcPts val="2200"/>
+              </a:lnSpc>
+              <a:spcAft>
+                <a:spcPts val="1000"/>
+              </a:spcAft>
+            </a:pPr>
+            <a:r>
+              <a:rPr sz="2000" b="0">
+                <a:solidFill>
+                  <a:srgbClr val="333333"/>
+                </a:solidFill>
+                <a:latin typeface="Calibri"/>
+              </a:rPr>
+              <a:t>      monitoring needs</a:t>
+            </a:r>
+          </a:p>
+        </p:txBody>
+      </p:sp>
+      <p:sp>
+        <p:nvSpPr>
+          <p:cNvPr id="4" name="TextBox 3"/>
+          <p:cNvSpPr txBox="1"/>
+          <p:nvPr/>
+        </p:nvSpPr>
+        <p:spPr>
+          <a:xfrm>
+            <a:off x="548640" y="6355080"/>
+            <a:ext cx="11064240" cy="320040"/>
+          </a:xfrm>
+          <a:prstGeom prst="rect">
+            <a:avLst/>
+          </a:prstGeom>
+          <a:noFill/>
+        </p:spPr>
+        <p:txBody>
+          <a:bodyPr wrap="square">
+            <a:noAutofit/>
+          </a:bodyPr>
+          <a:lstStyle/>
+          <a:p>
+            <a:pPr algn="r">
+              <a:lnSpc>
+                <a:spcPts val="2200"/>
+              </a:lnSpc>
+              <a:defRPr sz="1000" b="0">
+                <a:solidFill>
+                  <a:srgbClr val="666666"/>
+                </a:solidFill>
+                <a:latin typeface="Calibri"/>
+              </a:defRPr>
+            </a:pPr>
+            <a:r>
+              <a:t>Chapter 1 — Types Of Datasets</a:t>
             </a:r>
           </a:p>
         </p:txBody>
@@ -3800,8 +4971,8 @@
         </p:nvSpPr>
         <p:spPr>
           <a:xfrm>
-            <a:off x="548640" y="320040"/>
-            <a:ext cx="11064240" cy="914400"/>
+            <a:off x="548640" y="411480"/>
+            <a:ext cx="11064240" cy="777240"/>
           </a:xfrm>
           <a:prstGeom prst="rect">
             <a:avLst/>
@@ -3809,15 +4980,23 @@
           <a:noFill/>
         </p:spPr>
         <p:txBody>
-          <a:bodyPr wrap="none">
-            <a:spAutoFit/>
+          <a:bodyPr wrap="square">
+            <a:noAutofit/>
           </a:bodyPr>
           <a:lstStyle/>
           <a:p>
             <a:pPr>
-              <a:defRPr sz="3200" b="1"/>
+              <a:lnSpc>
+                <a:spcPts val="2200"/>
+              </a:lnSpc>
             </a:pPr>
             <a:r>
+              <a:rPr sz="2800" b="1">
+                <a:solidFill>
+                  <a:srgbClr val="1A1A2E"/>
+                </a:solidFill>
+                <a:latin typeface="Calibri"/>
+              </a:rPr>
               <a:t>Takeaways</a:t>
             </a:r>
           </a:p>
@@ -3831,8 +5010,8 @@
         </p:nvSpPr>
         <p:spPr>
           <a:xfrm>
-            <a:off x="731520" y="1280160"/>
-            <a:ext cx="10515600" cy="5029200"/>
+            <a:off x="548640" y="1234440"/>
+            <a:ext cx="11064240" cy="4937760"/>
           </a:xfrm>
           <a:prstGeom prst="rect">
             <a:avLst/>
@@ -3841,63 +5020,116 @@
         </p:spPr>
         <p:txBody>
           <a:bodyPr wrap="square">
-            <a:spAutoFit/>
+            <a:noAutofit/>
           </a:bodyPr>
           <a:lstStyle/>
           <a:p>
             <a:pPr>
-              <a:defRPr sz="2000"/>
+              <a:lnSpc>
+                <a:spcPts val="2200"/>
+              </a:lnSpc>
+              <a:spcAft>
+                <a:spcPts val="1000"/>
+              </a:spcAft>
             </a:pPr>
             <a:r>
-              <a:t>Structure and time are independent axes</a:t>
+              <a:rPr sz="2000" b="0">
+                <a:solidFill>
+                  <a:srgbClr val="333333"/>
+                </a:solidFill>
+                <a:latin typeface="Calibri"/>
+              </a:rPr>
+              <a:t>• Structure and time are independent axes</a:t>
             </a:r>
           </a:p>
           <a:p>
             <a:pPr>
-              <a:defRPr sz="2000"/>
+              <a:lnSpc>
+                <a:spcPts val="2200"/>
+              </a:lnSpc>
+              <a:spcAft>
+                <a:spcPts val="1000"/>
+              </a:spcAft>
             </a:pPr>
             <a:r>
-              <a:t>Structured data is easiest to query; unstructured needs extraction</a:t>
+              <a:rPr sz="2000" b="0">
+                <a:solidFill>
+                  <a:srgbClr val="333333"/>
+                </a:solidFill>
+                <a:latin typeface="Calibri"/>
+              </a:rPr>
+              <a:t>• Structured data is easiest to query; unstructured</a:t>
             </a:r>
           </a:p>
           <a:p>
             <a:pPr>
-              <a:defRPr sz="2000"/>
+              <a:lnSpc>
+                <a:spcPts val="2200"/>
+              </a:lnSpc>
+              <a:spcAft>
+                <a:spcPts val="1000"/>
+              </a:spcAft>
             </a:pPr>
             <a:r>
-              <a:t>Semi-structured sits between: flexible keys, still machine-readable</a:t>
-            </a:r>
-          </a:p>
-        </p:txBody>
-      </p:sp>
-    </p:spTree>
-  </p:cSld>
-  <p:clrMapOvr>
-    <a:masterClrMapping/>
-  </p:clrMapOvr>
-</p:sld>
-</file>
-
-<file path=ppt/slides/slide9.xml><?xml version="1.0" encoding="utf-8"?>
-<p:sld xmlns:a="http://schemas.openxmlformats.org/drawingml/2006/main" xmlns:p="http://schemas.openxmlformats.org/presentationml/2006/main" xmlns:r="http://schemas.openxmlformats.org/officeDocument/2006/relationships">
-  <p:cSld>
-    <p:spTree>
-      <p:nvGrpSpPr>
-        <p:cNvPr id="1" name=""/>
-        <p:cNvGrpSpPr/>
-        <p:nvPr/>
-      </p:nvGrpSpPr>
-      <p:grpSpPr/>
-      <p:sp>
-        <p:nvSpPr>
-          <p:cNvPr id="2" name="TextBox 1"/>
+              <a:rPr sz="2000" b="0">
+                <a:solidFill>
+                  <a:srgbClr val="333333"/>
+                </a:solidFill>
+                <a:latin typeface="Calibri"/>
+              </a:rPr>
+              <a:t>      needs extraction</a:t>
+            </a:r>
+          </a:p>
+          <a:p>
+            <a:pPr>
+              <a:lnSpc>
+                <a:spcPts val="2200"/>
+              </a:lnSpc>
+              <a:spcAft>
+                <a:spcPts val="1000"/>
+              </a:spcAft>
+            </a:pPr>
+            <a:r>
+              <a:rPr sz="2000" b="0">
+                <a:solidFill>
+                  <a:srgbClr val="333333"/>
+                </a:solidFill>
+                <a:latin typeface="Calibri"/>
+              </a:rPr>
+              <a:t>• Semi-structured sits between: flexible keys, still</a:t>
+            </a:r>
+          </a:p>
+          <a:p>
+            <a:pPr>
+              <a:lnSpc>
+                <a:spcPts val="2200"/>
+              </a:lnSpc>
+              <a:spcAft>
+                <a:spcPts val="1000"/>
+              </a:spcAft>
+            </a:pPr>
+            <a:r>
+              <a:rPr sz="2000" b="0">
+                <a:solidFill>
+                  <a:srgbClr val="333333"/>
+                </a:solidFill>
+                <a:latin typeface="Calibri"/>
+              </a:rPr>
+              <a:t>      machine-readable</a:t>
+            </a:r>
+          </a:p>
+        </p:txBody>
+      </p:sp>
+      <p:sp>
+        <p:nvSpPr>
+          <p:cNvPr id="4" name="TextBox 3"/>
           <p:cNvSpPr txBox="1"/>
           <p:nvPr/>
         </p:nvSpPr>
         <p:spPr>
           <a:xfrm>
-            <a:off x="548640" y="320040"/>
-            <a:ext cx="11064240" cy="914400"/>
+            <a:off x="548640" y="6355080"/>
+            <a:ext cx="11064240" cy="320040"/>
           </a:xfrm>
           <a:prstGeom prst="rect">
             <a:avLst/>
@@ -3905,55 +5137,24 @@
           <a:noFill/>
         </p:spPr>
         <p:txBody>
-          <a:bodyPr wrap="none">
-            <a:spAutoFit/>
+          <a:bodyPr wrap="square">
+            <a:noAutofit/>
           </a:bodyPr>
           <a:lstStyle/>
           <a:p>
-            <a:pPr>
-              <a:defRPr sz="3200" b="1"/>
+            <a:pPr algn="r">
+              <a:lnSpc>
+                <a:spcPts val="2200"/>
+              </a:lnSpc>
+              <a:defRPr sz="1000" b="0">
+                <a:solidFill>
+                  <a:srgbClr val="666666"/>
+                </a:solidFill>
+                <a:latin typeface="Calibri"/>
+              </a:defRPr>
             </a:pPr>
             <a:r>
-              <a:t>Next</a:t>
-            </a:r>
-          </a:p>
-        </p:txBody>
-      </p:sp>
-      <p:sp>
-        <p:nvSpPr>
-          <p:cNvPr id="3" name="TextBox 2"/>
-          <p:cNvSpPr txBox="1"/>
-          <p:nvPr/>
-        </p:nvSpPr>
-        <p:spPr>
-          <a:xfrm>
-            <a:off x="731520" y="1280160"/>
-            <a:ext cx="10515600" cy="5029200"/>
-          </a:xfrm>
-          <a:prstGeom prst="rect">
-            <a:avLst/>
-          </a:prstGeom>
-          <a:noFill/>
-        </p:spPr>
-        <p:txBody>
-          <a:bodyPr wrap="square">
-            <a:spAutoFit/>
-          </a:bodyPr>
-          <a:lstStyle/>
-          <a:p>
-            <a:pPr>
-              <a:defRPr sz="2000"/>
-            </a:pPr>
-            <a:r>
-              <a:t>Complete the quiz for this clip</a:t>
-            </a:r>
-          </a:p>
-          <a:p>
-            <a:pPr>
-              <a:defRPr sz="2000"/>
-            </a:pPr>
-            <a:r>
-              <a:t>Then continue to: Dataset formats</a:t>
+              <a:t>Chapter 1 — Types Of Datasets</a:t>
             </a:r>
           </a:p>
         </p:txBody>
@@ -4284,4 +5485,324 @@
   </a:objectDefaults>
   <a:extraClrSchemeLst/>
 </a:theme>
+</file>
+
+<file path=ppt/theme/theme2.xml><?xml version="1.0" encoding="utf-8"?>
+<a:theme xmlns:a="http://schemas.openxmlformats.org/drawingml/2006/main" name="Office Theme">
+  <a:themeElements>
+    <a:clrScheme name="Office">
+      <a:dk1>
+        <a:sysClr val="windowText" lastClr="000000"/>
+      </a:dk1>
+      <a:lt1>
+        <a:sysClr val="window" lastClr="FFFFFF"/>
+      </a:lt1>
+      <a:dk2>
+        <a:srgbClr val="1F497D"/>
+      </a:dk2>
+      <a:lt2>
+        <a:srgbClr val="EEECE1"/>
+      </a:lt2>
+      <a:accent1>
+        <a:srgbClr val="4F81BD"/>
+      </a:accent1>
+      <a:accent2>
+        <a:srgbClr val="C0504D"/>
+      </a:accent2>
+      <a:accent3>
+        <a:srgbClr val="9BBB59"/>
+      </a:accent3>
+      <a:accent4>
+        <a:srgbClr val="8064A2"/>
+      </a:accent4>
+      <a:accent5>
+        <a:srgbClr val="4BACC6"/>
+      </a:accent5>
+      <a:accent6>
+        <a:srgbClr val="F79646"/>
+      </a:accent6>
+      <a:hlink>
+        <a:srgbClr val="0000FF"/>
+      </a:hlink>
+      <a:folHlink>
+        <a:srgbClr val="800080"/>
+      </a:folHlink>
+    </a:clrScheme>
+    <a:fontScheme name="Office">
+      <a:majorFont>
+        <a:latin typeface="Calibri"/>
+        <a:ea typeface=""/>
+        <a:cs typeface=""/>
+        <a:font script="Jpan" typeface="ＭＳ Ｐゴシック"/>
+        <a:font script="Hang" typeface="맑은 고딕"/>
+        <a:font script="Hans" typeface="宋体"/>
+        <a:font script="Hant" typeface="新細明體"/>
+        <a:font script="Arab" typeface="Times New Roman"/>
+        <a:font script="Hebr" typeface="Times New Roman"/>
+        <a:font script="Thai" typeface="Angsana New"/>
+        <a:font script="Ethi" typeface="Nyala"/>
+        <a:font script="Beng" typeface="Vrinda"/>
+        <a:font script="Gujr" typeface="Shruti"/>
+        <a:font script="Khmr" typeface="MoolBoran"/>
+        <a:font script="Knda" typeface="Tunga"/>
+        <a:font script="Guru" typeface="Raavi"/>
+        <a:font script="Cans" typeface="Euphemia"/>
+        <a:font script="Cher" typeface="Plantagenet Cherokee"/>
+        <a:font script="Yiii" typeface="Microsoft Yi Baiti"/>
+        <a:font script="Tibt" typeface="Microsoft Himalaya"/>
+        <a:font script="Thaa" typeface="MV Boli"/>
+        <a:font script="Deva" typeface="Mangal"/>
+        <a:font script="Telu" typeface="Gautami"/>
+        <a:font script="Taml" typeface="Latha"/>
+        <a:font script="Syrc" typeface="Estrangelo Edessa"/>
+        <a:font script="Orya" typeface="Kalinga"/>
+        <a:font script="Mlym" typeface="Kartika"/>
+        <a:font script="Laoo" typeface="DokChampa"/>
+        <a:font script="Sinh" typeface="Iskoola Pota"/>
+        <a:font script="Mong" typeface="Mongolian Baiti"/>
+        <a:font script="Viet" typeface="Times New Roman"/>
+        <a:font script="Uigh" typeface="Microsoft Uighur"/>
+        <a:font script="Geor" typeface="Sylfaen"/>
+      </a:majorFont>
+      <a:minorFont>
+        <a:latin typeface="Calibri"/>
+        <a:ea typeface=""/>
+        <a:cs typeface=""/>
+        <a:font script="Jpan" typeface="ＭＳ Ｐゴシック"/>
+        <a:font script="Hang" typeface="맑은 고딕"/>
+        <a:font script="Hans" typeface="宋体"/>
+        <a:font script="Hant" typeface="新細明體"/>
+        <a:font script="Arab" typeface="Arial"/>
+        <a:font script="Hebr" typeface="Arial"/>
+        <a:font script="Thai" typeface="Cordia New"/>
+        <a:font script="Ethi" typeface="Nyala"/>
+        <a:font script="Beng" typeface="Vrinda"/>
+        <a:font script="Gujr" typeface="Shruti"/>
+        <a:font script="Khmr" typeface="DaunPenh"/>
+        <a:font script="Knda" typeface="Tunga"/>
+        <a:font script="Guru" typeface="Raavi"/>
+        <a:font script="Cans" typeface="Euphemia"/>
+        <a:font script="Cher" typeface="Plantagenet Cherokee"/>
+        <a:font script="Yiii" typeface="Microsoft Yi Baiti"/>
+        <a:font script="Tibt" typeface="Microsoft Himalaya"/>
+        <a:font script="Thaa" typeface="MV Boli"/>
+        <a:font script="Deva" typeface="Mangal"/>
+        <a:font script="Telu" typeface="Gautami"/>
+        <a:font script="Taml" typeface="Latha"/>
+        <a:font script="Syrc" typeface="Estrangelo Edessa"/>
+        <a:font script="Orya" typeface="Kalinga"/>
+        <a:font script="Mlym" typeface="Kartika"/>
+        <a:font script="Laoo" typeface="DokChampa"/>
+        <a:font script="Sinh" typeface="Iskoola Pota"/>
+        <a:font script="Mong" typeface="Mongolian Baiti"/>
+        <a:font script="Viet" typeface="Arial"/>
+        <a:font script="Uigh" typeface="Microsoft Uighur"/>
+        <a:font script="Geor" typeface="Sylfaen"/>
+      </a:minorFont>
+    </a:fontScheme>
+    <a:fmtScheme name="Office">
+      <a:fillStyleLst>
+        <a:solidFill>
+          <a:schemeClr val="phClr"/>
+        </a:solidFill>
+        <a:gradFill rotWithShape="1">
+          <a:gsLst>
+            <a:gs pos="0">
+              <a:schemeClr val="phClr">
+                <a:tint val="50000"/>
+                <a:satMod val="300000"/>
+              </a:schemeClr>
+            </a:gs>
+            <a:gs pos="35000">
+              <a:schemeClr val="phClr">
+                <a:tint val="37000"/>
+                <a:satMod val="300000"/>
+              </a:schemeClr>
+            </a:gs>
+            <a:gs pos="100000">
+              <a:schemeClr val="phClr">
+                <a:tint val="15000"/>
+                <a:satMod val="350000"/>
+              </a:schemeClr>
+            </a:gs>
+          </a:gsLst>
+          <a:lin ang="16200000" scaled="1"/>
+        </a:gradFill>
+        <a:gradFill rotWithShape="1">
+          <a:gsLst>
+            <a:gs pos="0">
+              <a:schemeClr val="phClr">
+                <a:tint val="100000"/>
+                <a:shade val="100000"/>
+                <a:satMod val="130000"/>
+              </a:schemeClr>
+            </a:gs>
+            <a:gs pos="100000">
+              <a:schemeClr val="phClr">
+                <a:tint val="50000"/>
+                <a:shade val="100000"/>
+                <a:satMod val="350000"/>
+              </a:schemeClr>
+            </a:gs>
+          </a:gsLst>
+          <a:lin ang="16200000" scaled="0"/>
+        </a:gradFill>
+      </a:fillStyleLst>
+      <a:lnStyleLst>
+        <a:ln w="9525" cap="flat" cmpd="sng" algn="ctr">
+          <a:solidFill>
+            <a:schemeClr val="phClr">
+              <a:shade val="95000"/>
+              <a:satMod val="105000"/>
+            </a:schemeClr>
+          </a:solidFill>
+          <a:prstDash val="solid"/>
+        </a:ln>
+        <a:ln w="25400" cap="flat" cmpd="sng" algn="ctr">
+          <a:solidFill>
+            <a:schemeClr val="phClr"/>
+          </a:solidFill>
+          <a:prstDash val="solid"/>
+        </a:ln>
+        <a:ln w="38100" cap="flat" cmpd="sng" algn="ctr">
+          <a:solidFill>
+            <a:schemeClr val="phClr"/>
+          </a:solidFill>
+          <a:prstDash val="solid"/>
+        </a:ln>
+      </a:lnStyleLst>
+      <a:effectStyleLst>
+        <a:effectStyle>
+          <a:effectLst>
+            <a:outerShdw blurRad="40000" dist="20000" dir="5400000" rotWithShape="0">
+              <a:srgbClr val="000000">
+                <a:alpha val="38000"/>
+              </a:srgbClr>
+            </a:outerShdw>
+          </a:effectLst>
+        </a:effectStyle>
+        <a:effectStyle>
+          <a:effectLst>
+            <a:outerShdw blurRad="40000" dist="23000" dir="5400000" rotWithShape="0">
+              <a:srgbClr val="000000">
+                <a:alpha val="35000"/>
+              </a:srgbClr>
+            </a:outerShdw>
+          </a:effectLst>
+        </a:effectStyle>
+        <a:effectStyle>
+          <a:effectLst>
+            <a:outerShdw blurRad="40000" dist="23000" dir="5400000" rotWithShape="0">
+              <a:srgbClr val="000000">
+                <a:alpha val="35000"/>
+              </a:srgbClr>
+            </a:outerShdw>
+          </a:effectLst>
+          <a:scene3d>
+            <a:camera prst="orthographicFront">
+              <a:rot lat="0" lon="0" rev="0"/>
+            </a:camera>
+            <a:lightRig rig="threePt" dir="t">
+              <a:rot lat="0" lon="0" rev="1200000"/>
+            </a:lightRig>
+          </a:scene3d>
+          <a:sp3d>
+            <a:bevelT w="63500" h="25400"/>
+          </a:sp3d>
+        </a:effectStyle>
+      </a:effectStyleLst>
+      <a:bgFillStyleLst>
+        <a:solidFill>
+          <a:schemeClr val="phClr"/>
+        </a:solidFill>
+        <a:gradFill rotWithShape="1">
+          <a:gsLst>
+            <a:gs pos="0">
+              <a:schemeClr val="phClr">
+                <a:tint val="40000"/>
+                <a:satMod val="350000"/>
+              </a:schemeClr>
+            </a:gs>
+            <a:gs pos="40000">
+              <a:schemeClr val="phClr">
+                <a:tint val="45000"/>
+                <a:shade val="99000"/>
+                <a:satMod val="350000"/>
+              </a:schemeClr>
+            </a:gs>
+            <a:gs pos="100000">
+              <a:schemeClr val="phClr">
+                <a:shade val="20000"/>
+                <a:satMod val="255000"/>
+              </a:schemeClr>
+            </a:gs>
+          </a:gsLst>
+          <a:path path="circle">
+            <a:fillToRect l="50000" t="-80000" r="50000" b="180000"/>
+          </a:path>
+        </a:gradFill>
+        <a:gradFill rotWithShape="1">
+          <a:gsLst>
+            <a:gs pos="0">
+              <a:schemeClr val="phClr">
+                <a:tint val="80000"/>
+                <a:satMod val="300000"/>
+              </a:schemeClr>
+            </a:gs>
+            <a:gs pos="100000">
+              <a:schemeClr val="phClr">
+                <a:shade val="30000"/>
+                <a:satMod val="200000"/>
+              </a:schemeClr>
+            </a:gs>
+          </a:gsLst>
+          <a:path path="circle">
+            <a:fillToRect l="50000" t="50000" r="50000" b="50000"/>
+          </a:path>
+        </a:gradFill>
+      </a:bgFillStyleLst>
+    </a:fmtScheme>
+  </a:themeElements>
+  <a:objectDefaults>
+    <a:spDef>
+      <a:spPr/>
+      <a:bodyPr/>
+      <a:lstStyle/>
+      <a:style>
+        <a:lnRef idx="1">
+          <a:schemeClr val="accent1"/>
+        </a:lnRef>
+        <a:fillRef idx="3">
+          <a:schemeClr val="accent1"/>
+        </a:fillRef>
+        <a:effectRef idx="2">
+          <a:schemeClr val="accent1"/>
+        </a:effectRef>
+        <a:fontRef idx="minor">
+          <a:schemeClr val="lt1"/>
+        </a:fontRef>
+      </a:style>
+    </a:spDef>
+    <a:lnDef>
+      <a:spPr/>
+      <a:bodyPr/>
+      <a:lstStyle/>
+      <a:style>
+        <a:lnRef idx="2">
+          <a:schemeClr val="accent1"/>
+        </a:lnRef>
+        <a:fillRef idx="0">
+          <a:schemeClr val="accent1"/>
+        </a:fillRef>
+        <a:effectRef idx="1">
+          <a:schemeClr val="accent1"/>
+        </a:effectRef>
+        <a:fontRef idx="minor">
+          <a:schemeClr val="tx1"/>
+        </a:fontRef>
+      </a:style>
+    </a:lnDef>
+  </a:objectDefaults>
+  <a:extraClrSchemeLst/>
+</a:theme>
 </file>
--- a/chapter1/clips/clip-02-types-of-datasets/clip.pptx
+++ b/chapter1/clips/clip-02-types-of-datasets/clip.pptx
@@ -6,13 +6,14 @@
   </p:sldMasterIdLst>
   <p:sldIdLst>
     <p:sldId id="256" r:id="rId7"/>
-    <p:sldId id="257" r:id="rId8"/>
-    <p:sldId id="258" r:id="rId9"/>
-    <p:sldId id="259" r:id="rId10"/>
-    <p:sldId id="260" r:id="rId11"/>
-    <p:sldId id="261" r:id="rId12"/>
+    <p:sldId id="257" r:id="rId9"/>
+    <p:sldId id="258" r:id="rId10"/>
+    <p:sldId id="259" r:id="rId11"/>
+    <p:sldId id="260" r:id="rId12"/>
+    <p:sldId id="261" r:id="rId13"/>
     <p:sldId id="262" r:id="rId14"/>
     <p:sldId id="263" r:id="rId15"/>
+    <p:sldId id="264" r:id="rId16"/>
   </p:sldIdLst>
   <p:sldSz cx="12191695" cy="6858000" type="screen4x3"/>
   <p:notesSz cx="6858000" cy="9144000"/>
@@ -509,17 +510,567 @@
           <a:lstStyle/>
           <a:p>
             <a:r>
-              <a:t>Flexible schema with tags or keys (JSON, XML, YAML)</a:t>
-            </a:r>
-          </a:p>
-          <a:p>
-            <a:r>
-              <a:t>Nested fields without a rigid relational table</a:t>
-            </a:r>
-          </a:p>
-          <a:p>
-            <a:r>
-              <a:t>Example 1.7: JSON objects with varying optional keys</a:t>
+              <a:t>With records and attributes defined, this clip classifies how datasets are organized. The taxonomy—structure and temporal behavior—appears throughout the rest of the book.</a:t>
+            </a:r>
+          </a:p>
+        </p:txBody>
+      </p:sp>
+      <p:sp>
+        <p:nvSpPr>
+          <p:cNvPr id="4" name="Slide Number Placeholder 3"/>
+          <p:cNvSpPr>
+            <a:spLocks noGrp="1"/>
+          </p:cNvSpPr>
+          <p:nvPr>
+            <p:ph type="sldNum" idx="5" sz="quarter"/>
+          </p:nvPr>
+        </p:nvSpPr>
+        <p:spPr/>
+      </p:sp>
+    </p:spTree>
+  </p:cSld>
+  <p:clrMapOvr>
+    <a:masterClrMapping/>
+  </p:clrMapOvr>
+</p:notes>
+</file>
+
+<file path=ppt/notesSlides/notesSlide2.xml><?xml version="1.0" encoding="utf-8"?>
+<p:notes xmlns:a="http://schemas.openxmlformats.org/drawingml/2006/main" xmlns:p="http://schemas.openxmlformats.org/presentationml/2006/main" xmlns:r="http://schemas.openxmlformats.org/officeDocument/2006/relationships">
+  <p:cSld>
+    <p:spTree>
+      <p:nvGrpSpPr>
+        <p:cNvPr id="1" name=""/>
+        <p:cNvGrpSpPr/>
+        <p:nvPr/>
+      </p:nvGrpSpPr>
+      <p:grpSpPr>
+        <a:xfrm>
+          <a:off x="0" y="0"/>
+          <a:ext cx="0" cy="0"/>
+          <a:chOff x="0" y="0"/>
+          <a:chExt cx="0" cy="0"/>
+        </a:xfrm>
+      </p:grpSpPr>
+      <p:sp>
+        <p:nvSpPr>
+          <p:cNvPr id="2" name="Slide Image Placeholder 1"/>
+          <p:cNvSpPr>
+            <a:spLocks noGrp="1"/>
+          </p:cNvSpPr>
+          <p:nvPr>
+            <p:ph type="sldImg" idx="2"/>
+          </p:nvPr>
+        </p:nvSpPr>
+        <p:spPr/>
+      </p:sp>
+      <p:sp>
+        <p:nvSpPr>
+          <p:cNvPr id="3" name="Notes Placeholder 2"/>
+          <p:cNvSpPr>
+            <a:spLocks noGrp="1"/>
+          </p:cNvSpPr>
+          <p:nvPr>
+            <p:ph type="body" idx="3" sz="quarter"/>
+          </p:nvPr>
+        </p:nvSpPr>
+        <p:spPr/>
+        <p:txBody>
+          <a:bodyPr/>
+          <a:lstStyle/>
+          <a:p>
+            <a:r>
+              <a:t>By the end of this clip, you should contrast the three structural types, name a typical format for each, and explain when a dataset is static versus dynamic.</a:t>
+            </a:r>
+          </a:p>
+        </p:txBody>
+      </p:sp>
+      <p:sp>
+        <p:nvSpPr>
+          <p:cNvPr id="4" name="Slide Number Placeholder 3"/>
+          <p:cNvSpPr>
+            <a:spLocks noGrp="1"/>
+          </p:cNvSpPr>
+          <p:nvPr>
+            <p:ph type="sldNum" idx="5" sz="quarter"/>
+          </p:nvPr>
+        </p:nvSpPr>
+        <p:spPr/>
+      </p:sp>
+    </p:spTree>
+  </p:cSld>
+  <p:clrMapOvr>
+    <a:masterClrMapping/>
+  </p:clrMapOvr>
+</p:notes>
+</file>
+
+<file path=ppt/notesSlides/notesSlide3.xml><?xml version="1.0" encoding="utf-8"?>
+<p:notes xmlns:a="http://schemas.openxmlformats.org/drawingml/2006/main" xmlns:p="http://schemas.openxmlformats.org/presentationml/2006/main" xmlns:r="http://schemas.openxmlformats.org/officeDocument/2006/relationships">
+  <p:cSld>
+    <p:spTree>
+      <p:nvGrpSpPr>
+        <p:cNvPr id="1" name=""/>
+        <p:cNvGrpSpPr/>
+        <p:nvPr/>
+      </p:nvGrpSpPr>
+      <p:grpSpPr>
+        <a:xfrm>
+          <a:off x="0" y="0"/>
+          <a:ext cx="0" cy="0"/>
+          <a:chOff x="0" y="0"/>
+          <a:chExt cx="0" cy="0"/>
+        </a:xfrm>
+      </p:grpSpPr>
+      <p:sp>
+        <p:nvSpPr>
+          <p:cNvPr id="2" name="Slide Image Placeholder 1"/>
+          <p:cNvSpPr>
+            <a:spLocks noGrp="1"/>
+          </p:cNvSpPr>
+          <p:nvPr>
+            <p:ph type="sldImg" idx="2"/>
+          </p:nvPr>
+        </p:nvSpPr>
+        <p:spPr/>
+      </p:sp>
+      <p:sp>
+        <p:nvSpPr>
+          <p:cNvPr id="3" name="Notes Placeholder 2"/>
+          <p:cNvSpPr>
+            <a:spLocks noGrp="1"/>
+          </p:cNvSpPr>
+          <p:nvPr>
+            <p:ph type="body" idx="3" sz="quarter"/>
+          </p:nvPr>
+        </p:nvSpPr>
+        <p:spPr/>
+        <p:txBody>
+          <a:bodyPr/>
+          <a:lstStyle/>
+          <a:p>
+            <a:r>
+              <a:t>Datasets are commonly classified along two axes. Structure covers structured, unstructured, and semi-structured forms. Temporal behavior covers static snapshots versus continuously updating streams. Selecting an appropriate representation is a prerequisite for reliable analysis.</a:t>
+            </a:r>
+          </a:p>
+        </p:txBody>
+      </p:sp>
+      <p:sp>
+        <p:nvSpPr>
+          <p:cNvPr id="4" name="Slide Number Placeholder 3"/>
+          <p:cNvSpPr>
+            <a:spLocks noGrp="1"/>
+          </p:cNvSpPr>
+          <p:nvPr>
+            <p:ph type="sldNum" idx="5" sz="quarter"/>
+          </p:nvPr>
+        </p:nvSpPr>
+        <p:spPr/>
+      </p:sp>
+    </p:spTree>
+  </p:cSld>
+  <p:clrMapOvr>
+    <a:masterClrMapping/>
+  </p:clrMapOvr>
+</p:notes>
+</file>
+
+<file path=ppt/notesSlides/notesSlide4.xml><?xml version="1.0" encoding="utf-8"?>
+<p:notes xmlns:a="http://schemas.openxmlformats.org/drawingml/2006/main" xmlns:p="http://schemas.openxmlformats.org/presentationml/2006/main" xmlns:r="http://schemas.openxmlformats.org/officeDocument/2006/relationships">
+  <p:cSld>
+    <p:spTree>
+      <p:nvGrpSpPr>
+        <p:cNvPr id="1" name=""/>
+        <p:cNvGrpSpPr/>
+        <p:nvPr/>
+      </p:nvGrpSpPr>
+      <p:grpSpPr>
+        <a:xfrm>
+          <a:off x="0" y="0"/>
+          <a:ext cx="0" cy="0"/>
+          <a:chOff x="0" y="0"/>
+          <a:chExt cx="0" cy="0"/>
+        </a:xfrm>
+      </p:grpSpPr>
+      <p:sp>
+        <p:nvSpPr>
+          <p:cNvPr id="2" name="Slide Image Placeholder 1"/>
+          <p:cNvSpPr>
+            <a:spLocks noGrp="1"/>
+          </p:cNvSpPr>
+          <p:nvPr>
+            <p:ph type="sldImg" idx="2"/>
+          </p:nvPr>
+        </p:nvSpPr>
+        <p:spPr/>
+      </p:sp>
+      <p:sp>
+        <p:nvSpPr>
+          <p:cNvPr id="3" name="Notes Placeholder 2"/>
+          <p:cNvSpPr>
+            <a:spLocks noGrp="1"/>
+          </p:cNvSpPr>
+          <p:nvPr>
+            <p:ph type="body" idx="3" sz="quarter"/>
+          </p:nvPr>
+        </p:nvSpPr>
+        <p:spPr/>
+        <p:txBody>
+          <a:bodyPr/>
+          <a:lstStyle/>
+          <a:p>
+            <a:r>
+              <a:t>Structured datasets follow a fixed schema: rows and columns with consistent types. They live comfortably in spreadsheets and relational databases and are generally the easiest to query and aggregate. A retail customer table—one row per customer, typed columns for email and purchase history—is the textbook case.</a:t>
+            </a:r>
+          </a:p>
+        </p:txBody>
+      </p:sp>
+      <p:sp>
+        <p:nvSpPr>
+          <p:cNvPr id="4" name="Slide Number Placeholder 3"/>
+          <p:cNvSpPr>
+            <a:spLocks noGrp="1"/>
+          </p:cNvSpPr>
+          <p:nvPr>
+            <p:ph type="sldNum" idx="5" sz="quarter"/>
+          </p:nvPr>
+        </p:nvSpPr>
+        <p:spPr/>
+      </p:sp>
+    </p:spTree>
+  </p:cSld>
+  <p:clrMapOvr>
+    <a:masterClrMapping/>
+  </p:clrMapOvr>
+</p:notes>
+</file>
+
+<file path=ppt/notesSlides/notesSlide5.xml><?xml version="1.0" encoding="utf-8"?>
+<p:notes xmlns:a="http://schemas.openxmlformats.org/drawingml/2006/main" xmlns:p="http://schemas.openxmlformats.org/presentationml/2006/main" xmlns:r="http://schemas.openxmlformats.org/officeDocument/2006/relationships">
+  <p:cSld>
+    <p:spTree>
+      <p:nvGrpSpPr>
+        <p:cNvPr id="1" name=""/>
+        <p:cNvGrpSpPr/>
+        <p:nvPr/>
+      </p:nvGrpSpPr>
+      <p:grpSpPr>
+        <a:xfrm>
+          <a:off x="0" y="0"/>
+          <a:ext cx="0" cy="0"/>
+          <a:chOff x="0" y="0"/>
+          <a:chExt cx="0" cy="0"/>
+        </a:xfrm>
+      </p:grpSpPr>
+      <p:sp>
+        <p:nvSpPr>
+          <p:cNvPr id="2" name="Slide Image Placeholder 1"/>
+          <p:cNvSpPr>
+            <a:spLocks noGrp="1"/>
+          </p:cNvSpPr>
+          <p:nvPr>
+            <p:ph type="sldImg" idx="2"/>
+          </p:nvPr>
+        </p:nvSpPr>
+        <p:spPr/>
+      </p:sp>
+      <p:sp>
+        <p:nvSpPr>
+          <p:cNvPr id="3" name="Notes Placeholder 2"/>
+          <p:cNvSpPr>
+            <a:spLocks noGrp="1"/>
+          </p:cNvSpPr>
+          <p:nvPr>
+            <p:ph type="body" idx="3" sz="quarter"/>
+          </p:nvPr>
+        </p:nvSpPr>
+        <p:spPr/>
+        <p:txBody>
+          <a:bodyPr/>
+          <a:lstStyle/>
+          <a:p>
+            <a:r>
+              <a:t>Unstructured data has no predefined row–column model. Text, images, audio, and video fall here. Valuable insights often require NLP or image recognition rather than a simple SQL filter. Social media feedback and medical images are common examples.</a:t>
+            </a:r>
+          </a:p>
+        </p:txBody>
+      </p:sp>
+      <p:sp>
+        <p:nvSpPr>
+          <p:cNvPr id="4" name="Slide Number Placeholder 3"/>
+          <p:cNvSpPr>
+            <a:spLocks noGrp="1"/>
+          </p:cNvSpPr>
+          <p:nvPr>
+            <p:ph type="sldNum" idx="5" sz="quarter"/>
+          </p:nvPr>
+        </p:nvSpPr>
+        <p:spPr/>
+      </p:sp>
+    </p:spTree>
+  </p:cSld>
+  <p:clrMapOvr>
+    <a:masterClrMapping/>
+  </p:clrMapOvr>
+</p:notes>
+</file>
+
+<file path=ppt/notesSlides/notesSlide6.xml><?xml version="1.0" encoding="utf-8"?>
+<p:notes xmlns:a="http://schemas.openxmlformats.org/drawingml/2006/main" xmlns:p="http://schemas.openxmlformats.org/presentationml/2006/main" xmlns:r="http://schemas.openxmlformats.org/officeDocument/2006/relationships">
+  <p:cSld>
+    <p:spTree>
+      <p:nvGrpSpPr>
+        <p:cNvPr id="1" name=""/>
+        <p:cNvGrpSpPr/>
+        <p:nvPr/>
+      </p:nvGrpSpPr>
+      <p:grpSpPr>
+        <a:xfrm>
+          <a:off x="0" y="0"/>
+          <a:ext cx="0" cy="0"/>
+          <a:chOff x="0" y="0"/>
+          <a:chExt cx="0" cy="0"/>
+        </a:xfrm>
+      </p:grpSpPr>
+      <p:sp>
+        <p:nvSpPr>
+          <p:cNvPr id="2" name="Slide Image Placeholder 1"/>
+          <p:cNvSpPr>
+            <a:spLocks noGrp="1"/>
+          </p:cNvSpPr>
+          <p:nvPr>
+            <p:ph type="sldImg" idx="2"/>
+          </p:nvPr>
+        </p:nvSpPr>
+        <p:spPr/>
+      </p:sp>
+      <p:sp>
+        <p:nvSpPr>
+          <p:cNvPr id="3" name="Notes Placeholder 2"/>
+          <p:cNvSpPr>
+            <a:spLocks noGrp="1"/>
+          </p:cNvSpPr>
+          <p:nvPr>
+            <p:ph type="body" idx="3" sz="quarter"/>
+          </p:nvPr>
+        </p:nvSpPr>
+        <p:spPr/>
+        <p:txBody>
+          <a:bodyPr/>
+          <a:lstStyle/>
+          <a:p>
+            <a:r>
+              <a:t>Semi-structured data uses tags or keys—JSON, XML, YAML—without requiring every record to share the same flat columns. Example 1.7 shows JSON objects where optional fields appear when relevant. Open the example 7 module to inspect a concrete sample.</a:t>
+            </a:r>
+          </a:p>
+        </p:txBody>
+      </p:sp>
+      <p:sp>
+        <p:nvSpPr>
+          <p:cNvPr id="4" name="Slide Number Placeholder 3"/>
+          <p:cNvSpPr>
+            <a:spLocks noGrp="1"/>
+          </p:cNvSpPr>
+          <p:nvPr>
+            <p:ph type="sldNum" idx="5" sz="quarter"/>
+          </p:nvPr>
+        </p:nvSpPr>
+        <p:spPr/>
+      </p:sp>
+    </p:spTree>
+  </p:cSld>
+  <p:clrMapOvr>
+    <a:masterClrMapping/>
+  </p:clrMapOvr>
+</p:notes>
+</file>
+
+<file path=ppt/notesSlides/notesSlide7.xml><?xml version="1.0" encoding="utf-8"?>
+<p:notes xmlns:a="http://schemas.openxmlformats.org/drawingml/2006/main" xmlns:p="http://schemas.openxmlformats.org/presentationml/2006/main" xmlns:r="http://schemas.openxmlformats.org/officeDocument/2006/relationships">
+  <p:cSld>
+    <p:spTree>
+      <p:nvGrpSpPr>
+        <p:cNvPr id="1" name=""/>
+        <p:cNvGrpSpPr/>
+        <p:nvPr/>
+      </p:nvGrpSpPr>
+      <p:grpSpPr>
+        <a:xfrm>
+          <a:off x="0" y="0"/>
+          <a:ext cx="0" cy="0"/>
+          <a:chOff x="0" y="0"/>
+          <a:chExt cx="0" cy="0"/>
+        </a:xfrm>
+      </p:grpSpPr>
+      <p:sp>
+        <p:nvSpPr>
+          <p:cNvPr id="2" name="Slide Image Placeholder 1"/>
+          <p:cNvSpPr>
+            <a:spLocks noGrp="1"/>
+          </p:cNvSpPr>
+          <p:nvPr>
+            <p:ph type="sldImg" idx="2"/>
+          </p:nvPr>
+        </p:nvSpPr>
+        <p:spPr/>
+      </p:sp>
+      <p:sp>
+        <p:nvSpPr>
+          <p:cNvPr id="3" name="Notes Placeholder 2"/>
+          <p:cNvSpPr>
+            <a:spLocks noGrp="1"/>
+          </p:cNvSpPr>
+          <p:nvPr>
+            <p:ph type="body" idx="3" sz="quarter"/>
+          </p:nvPr>
+        </p:nvSpPr>
+        <p:spPr/>
+        <p:txBody>
+          <a:bodyPr/>
+          <a:lstStyle/>
+          <a:p>
+            <a:r>
+              <a:t>Static datasets change rarely—an archived extract. Dynamic datasets update continuously—sensor streams or click logs. The same entity can move between forms over its lifecycle. Temporal behavior shapes how often you refresh, version, and monitor the data.</a:t>
+            </a:r>
+          </a:p>
+        </p:txBody>
+      </p:sp>
+      <p:sp>
+        <p:nvSpPr>
+          <p:cNvPr id="4" name="Slide Number Placeholder 3"/>
+          <p:cNvSpPr>
+            <a:spLocks noGrp="1"/>
+          </p:cNvSpPr>
+          <p:nvPr>
+            <p:ph type="sldNum" idx="5" sz="quarter"/>
+          </p:nvPr>
+        </p:nvSpPr>
+        <p:spPr/>
+      </p:sp>
+    </p:spTree>
+  </p:cSld>
+  <p:clrMapOvr>
+    <a:masterClrMapping/>
+  </p:clrMapOvr>
+</p:notes>
+</file>
+
+<file path=ppt/notesSlides/notesSlide8.xml><?xml version="1.0" encoding="utf-8"?>
+<p:notes xmlns:a="http://schemas.openxmlformats.org/drawingml/2006/main" xmlns:p="http://schemas.openxmlformats.org/presentationml/2006/main" xmlns:r="http://schemas.openxmlformats.org/officeDocument/2006/relationships">
+  <p:cSld>
+    <p:spTree>
+      <p:nvGrpSpPr>
+        <p:cNvPr id="1" name=""/>
+        <p:cNvGrpSpPr/>
+        <p:nvPr/>
+      </p:nvGrpSpPr>
+      <p:grpSpPr>
+        <a:xfrm>
+          <a:off x="0" y="0"/>
+          <a:ext cx="0" cy="0"/>
+          <a:chOff x="0" y="0"/>
+          <a:chExt cx="0" cy="0"/>
+        </a:xfrm>
+      </p:grpSpPr>
+      <p:sp>
+        <p:nvSpPr>
+          <p:cNvPr id="2" name="Slide Image Placeholder 1"/>
+          <p:cNvSpPr>
+            <a:spLocks noGrp="1"/>
+          </p:cNvSpPr>
+          <p:nvPr>
+            <p:ph type="sldImg" idx="2"/>
+          </p:nvPr>
+        </p:nvSpPr>
+        <p:spPr/>
+      </p:sp>
+      <p:sp>
+        <p:nvSpPr>
+          <p:cNvPr id="3" name="Notes Placeholder 2"/>
+          <p:cNvSpPr>
+            <a:spLocks noGrp="1"/>
+          </p:cNvSpPr>
+          <p:nvPr>
+            <p:ph type="body" idx="3" sz="quarter"/>
+          </p:nvPr>
+        </p:nvSpPr>
+        <p:spPr/>
+        <p:txBody>
+          <a:bodyPr/>
+          <a:lstStyle/>
+          <a:p>
+            <a:r>
+              <a:t>Structure and time are independent. Structured data is easiest to query; unstructured data needs extraction pipelines; semi-structured data offers flexible keys that remain machine-readable.</a:t>
+            </a:r>
+          </a:p>
+        </p:txBody>
+      </p:sp>
+      <p:sp>
+        <p:nvSpPr>
+          <p:cNvPr id="4" name="Slide Number Placeholder 3"/>
+          <p:cNvSpPr>
+            <a:spLocks noGrp="1"/>
+          </p:cNvSpPr>
+          <p:nvPr>
+            <p:ph type="sldNum" idx="5" sz="quarter"/>
+          </p:nvPr>
+        </p:nvSpPr>
+        <p:spPr/>
+      </p:sp>
+    </p:spTree>
+  </p:cSld>
+  <p:clrMapOvr>
+    <a:masterClrMapping/>
+  </p:clrMapOvr>
+</p:notes>
+</file>
+
+<file path=ppt/notesSlides/notesSlide9.xml><?xml version="1.0" encoding="utf-8"?>
+<p:notes xmlns:a="http://schemas.openxmlformats.org/drawingml/2006/main" xmlns:p="http://schemas.openxmlformats.org/presentationml/2006/main" xmlns:r="http://schemas.openxmlformats.org/officeDocument/2006/relationships">
+  <p:cSld>
+    <p:spTree>
+      <p:nvGrpSpPr>
+        <p:cNvPr id="1" name=""/>
+        <p:cNvGrpSpPr/>
+        <p:nvPr/>
+      </p:nvGrpSpPr>
+      <p:grpSpPr>
+        <a:xfrm>
+          <a:off x="0" y="0"/>
+          <a:ext cx="0" cy="0"/>
+          <a:chOff x="0" y="0"/>
+          <a:chExt cx="0" cy="0"/>
+        </a:xfrm>
+      </p:grpSpPr>
+      <p:sp>
+        <p:nvSpPr>
+          <p:cNvPr id="2" name="Slide Image Placeholder 1"/>
+          <p:cNvSpPr>
+            <a:spLocks noGrp="1"/>
+          </p:cNvSpPr>
+          <p:nvPr>
+            <p:ph type="sldImg" idx="2"/>
+          </p:nvPr>
+        </p:nvSpPr>
+        <p:spPr/>
+      </p:sp>
+      <p:sp>
+        <p:nvSpPr>
+          <p:cNvPr id="3" name="Notes Placeholder 2"/>
+          <p:cNvSpPr>
+            <a:spLocks noGrp="1"/>
+          </p:cNvSpPr>
+          <p:nvPr>
+            <p:ph type="body" idx="3" sz="quarter"/>
+          </p:nvPr>
+        </p:nvSpPr>
+        <p:spPr/>
+        <p:txBody>
+          <a:bodyPr/>
+          <a:lstStyle/>
+          <a:p>
+            <a:r>
+              <a:t>Complete the quiz, then continue to dataset formats—how these types are stored on disk.</a:t>
             </a:r>
           </a:p>
         </p:txBody>
@@ -3581,7 +4132,7 @@
                 </a:solidFill>
                 <a:latin typeface="Calibri"/>
               </a:rPr>
-              <a:t>Classify datasets by structure and temporal behavior</a:t>
+              <a:t>This clip classifies how datasets are organized</a:t>
             </a:r>
           </a:p>
         </p:txBody>
@@ -3620,7 +4171,7 @@
               </a:defRPr>
             </a:pPr>
             <a:r>
-              <a:t>Chapter 1 — Types Of Datasets</a:t>
+              <a:t>Chapter 1 — 02 Types Of Datasets</a:t>
             </a:r>
           </a:p>
         </p:txBody>
@@ -3705,31 +4256,33 @@
           <a:lstStyle/>
           <a:p>
             <a:pPr>
+              <a:spcAft>
+                <a:spcPts val="1000"/>
+              </a:spcAft>
+              <a:buChar char="•"/>
               <a:lnSpc>
                 <a:spcPts val="2200"/>
               </a:lnSpc>
+            </a:pPr>
+            <a:r>
+              <a:rPr sz="2000" b="0">
+                <a:solidFill>
+                  <a:srgbClr val="333333"/>
+                </a:solidFill>
+                <a:latin typeface="Calibri"/>
+              </a:rPr>
+              <a:t>Contrast the three structural types, name a typical format for each</a:t>
+            </a:r>
+          </a:p>
+          <a:p>
+            <a:pPr>
               <a:spcAft>
                 <a:spcPts val="1000"/>
               </a:spcAft>
-            </a:pPr>
-            <a:r>
-              <a:rPr sz="2000" b="0">
-                <a:solidFill>
-                  <a:srgbClr val="333333"/>
-                </a:solidFill>
-                <a:latin typeface="Calibri"/>
-              </a:rPr>
-              <a:t>• Contrast structured, unstructured, and semi-</a:t>
-            </a:r>
-          </a:p>
-          <a:p>
-            <a:pPr>
+              <a:buChar char="•"/>
               <a:lnSpc>
                 <a:spcPts val="2200"/>
               </a:lnSpc>
-              <a:spcAft>
-                <a:spcPts val="1000"/>
-              </a:spcAft>
             </a:pPr>
             <a:r>
               <a:rPr sz="2000" b="0">
@@ -3738,64 +4291,7 @@
                 </a:solidFill>
                 <a:latin typeface="Calibri"/>
               </a:rPr>
-              <a:t>      structured data</a:t>
-            </a:r>
-          </a:p>
-          <a:p>
-            <a:pPr>
-              <a:lnSpc>
-                <a:spcPts val="2200"/>
-              </a:lnSpc>
-              <a:spcAft>
-                <a:spcPts val="1000"/>
-              </a:spcAft>
-            </a:pPr>
-            <a:r>
-              <a:rPr sz="2000" b="0">
-                <a:solidFill>
-                  <a:srgbClr val="333333"/>
-                </a:solidFill>
-                <a:latin typeface="Calibri"/>
-              </a:rPr>
-              <a:t>• Give a typical format and example for each</a:t>
-            </a:r>
-          </a:p>
-          <a:p>
-            <a:pPr>
-              <a:lnSpc>
-                <a:spcPts val="2200"/>
-              </a:lnSpc>
-              <a:spcAft>
-                <a:spcPts val="1000"/>
-              </a:spcAft>
-            </a:pPr>
-            <a:r>
-              <a:rPr sz="2000" b="0">
-                <a:solidFill>
-                  <a:srgbClr val="333333"/>
-                </a:solidFill>
-                <a:latin typeface="Calibri"/>
-              </a:rPr>
-              <a:t>      structural type</a:t>
-            </a:r>
-          </a:p>
-          <a:p>
-            <a:pPr>
-              <a:lnSpc>
-                <a:spcPts val="2200"/>
-              </a:lnSpc>
-              <a:spcAft>
-                <a:spcPts val="1000"/>
-              </a:spcAft>
-            </a:pPr>
-            <a:r>
-              <a:rPr sz="2000" b="0">
-                <a:solidFill>
-                  <a:srgbClr val="333333"/>
-                </a:solidFill>
-                <a:latin typeface="Calibri"/>
-              </a:rPr>
-              <a:t>• Distinguish static from dynamic datasets</a:t>
+              <a:t>Explain when a dataset is static versus dynamic</a:t>
             </a:r>
           </a:p>
         </p:txBody>
@@ -3834,7 +4330,7 @@
               </a:defRPr>
             </a:pPr>
             <a:r>
-              <a:t>Chapter 1 — Types Of Datasets</a:t>
+              <a:t>Chapter 1 — 02 Types Of Datasets</a:t>
             </a:r>
           </a:p>
         </p:txBody>
@@ -3919,105 +4415,73 @@
           <a:lstStyle/>
           <a:p>
             <a:pPr>
+              <a:spcAft>
+                <a:spcPts val="1000"/>
+              </a:spcAft>
+              <a:buChar char="•"/>
               <a:lnSpc>
                 <a:spcPts val="2200"/>
               </a:lnSpc>
+            </a:pPr>
+            <a:r>
+              <a:rPr sz="2000" b="0">
+                <a:solidFill>
+                  <a:srgbClr val="333333"/>
+                </a:solidFill>
+                <a:latin typeface="Calibri"/>
+              </a:rPr>
+              <a:t>Datasets are commonly classified along two axes</a:t>
+            </a:r>
+          </a:p>
+          <a:p>
+            <a:pPr>
               <a:spcAft>
                 <a:spcPts val="1000"/>
               </a:spcAft>
-            </a:pPr>
-            <a:r>
-              <a:rPr sz="2000" b="0">
-                <a:solidFill>
-                  <a:srgbClr val="333333"/>
-                </a:solidFill>
-                <a:latin typeface="Calibri"/>
-              </a:rPr>
-              <a:t>• </a:t>
-            </a:r>
-            <a:r>
-              <a:rPr sz="2000" b="1">
-                <a:solidFill>
-                  <a:srgbClr val="333333"/>
-                </a:solidFill>
-                <a:latin typeface="Calibri"/>
-              </a:rPr>
-              <a:t>Structure:</a:t>
-            </a:r>
-            <a:r>
-              <a:rPr sz="2000" b="0">
-                <a:solidFill>
-                  <a:srgbClr val="333333"/>
-                </a:solidFill>
-                <a:latin typeface="Calibri"/>
-              </a:rPr>
-              <a:t> structured / unstructured / semi-</a:t>
-            </a:r>
-          </a:p>
-          <a:p>
-            <a:pPr>
+              <a:buChar char="•"/>
               <a:lnSpc>
                 <a:spcPts val="2200"/>
               </a:lnSpc>
+            </a:pPr>
+            <a:r>
+              <a:rPr sz="2000" b="0">
+                <a:solidFill>
+                  <a:srgbClr val="333333"/>
+                </a:solidFill>
+                <a:latin typeface="Calibri"/>
+              </a:rPr>
+              <a:t>Structure covers structured, unstructured, and semi-structured forms</a:t>
+            </a:r>
+          </a:p>
+          <a:p>
+            <a:pPr>
               <a:spcAft>
                 <a:spcPts val="1000"/>
               </a:spcAft>
-            </a:pPr>
-            <a:r>
-              <a:rPr sz="2000" b="0">
-                <a:solidFill>
-                  <a:srgbClr val="333333"/>
-                </a:solidFill>
-                <a:latin typeface="Calibri"/>
-              </a:rPr>
-              <a:t>      structured</a:t>
-            </a:r>
-          </a:p>
-          <a:p>
-            <a:pPr>
+              <a:buChar char="•"/>
               <a:lnSpc>
                 <a:spcPts val="2200"/>
               </a:lnSpc>
+            </a:pPr>
+            <a:r>
+              <a:rPr sz="2000" b="0">
+                <a:solidFill>
+                  <a:srgbClr val="333333"/>
+                </a:solidFill>
+                <a:latin typeface="Calibri"/>
+              </a:rPr>
+              <a:t>Temporal behavior covers static snapshots versus continuously updating streams</a:t>
+            </a:r>
+          </a:p>
+          <a:p>
+            <a:pPr>
               <a:spcAft>
                 <a:spcPts val="1000"/>
               </a:spcAft>
-            </a:pPr>
-            <a:r>
-              <a:rPr sz="2000" b="0">
-                <a:solidFill>
-                  <a:srgbClr val="333333"/>
-                </a:solidFill>
-                <a:latin typeface="Calibri"/>
-              </a:rPr>
-              <a:t>• </a:t>
-            </a:r>
-            <a:r>
-              <a:rPr sz="2000" b="1">
-                <a:solidFill>
-                  <a:srgbClr val="333333"/>
-                </a:solidFill>
-                <a:latin typeface="Calibri"/>
-              </a:rPr>
-              <a:t>Temporal behavior:</a:t>
-            </a:r>
-            <a:r>
-              <a:rPr sz="2000" b="0">
-                <a:solidFill>
-                  <a:srgbClr val="333333"/>
-                </a:solidFill>
-                <a:latin typeface="Calibri"/>
-              </a:rPr>
-              <a:t> static vs dynamic</a:t>
-            </a:r>
-          </a:p>
-          <a:p>
-            <a:pPr>
+              <a:buChar char="•"/>
               <a:lnSpc>
                 <a:spcPts val="2200"/>
               </a:lnSpc>
-              <a:spcAft>
-                <a:spcPts val="1000"/>
-              </a:spcAft>
             </a:pPr>
             <a:r>
               <a:rPr sz="2000" b="0">
@@ -4026,45 +4490,7 @@
                 </a:solidFill>
                 <a:latin typeface="Calibri"/>
               </a:rPr>
-              <a:t>• Structure affects how you store, query, and analyze</a:t>
-            </a:r>
-          </a:p>
-          <a:p>
-            <a:pPr>
-              <a:lnSpc>
-                <a:spcPts val="2200"/>
-              </a:lnSpc>
-              <a:spcAft>
-                <a:spcPts val="1000"/>
-              </a:spcAft>
-            </a:pPr>
-            <a:r>
-              <a:rPr sz="2000" b="0">
-                <a:solidFill>
-                  <a:srgbClr val="333333"/>
-                </a:solidFill>
-                <a:latin typeface="Calibri"/>
-              </a:rPr>
-              <a:t>• Choosing the right representation is a prerequisite</a:t>
-            </a:r>
-          </a:p>
-          <a:p>
-            <a:pPr>
-              <a:lnSpc>
-                <a:spcPts val="2200"/>
-              </a:lnSpc>
-              <a:spcAft>
-                <a:spcPts val="1000"/>
-              </a:spcAft>
-            </a:pPr>
-            <a:r>
-              <a:rPr sz="2000" b="0">
-                <a:solidFill>
-                  <a:srgbClr val="333333"/>
-                </a:solidFill>
-                <a:latin typeface="Calibri"/>
-              </a:rPr>
-              <a:t>      for reliable analysis</a:t>
+              <a:t>Selecting an appropriate representation is a prerequisite for reliable analysis</a:t>
             </a:r>
           </a:p>
         </p:txBody>
@@ -4103,7 +4529,7 @@
               </a:defRPr>
             </a:pPr>
             <a:r>
-              <a:t>Chapter 1 — Types Of Datasets</a:t>
+              <a:t>Chapter 1 — 02 Types Of Datasets</a:t>
             </a:r>
           </a:p>
         </p:txBody>
@@ -4188,50 +4614,53 @@
           <a:lstStyle/>
           <a:p>
             <a:pPr>
+              <a:spcAft>
+                <a:spcPts val="1000"/>
+              </a:spcAft>
+              <a:buChar char="•"/>
               <a:lnSpc>
                 <a:spcPts val="2200"/>
               </a:lnSpc>
+            </a:pPr>
+            <a:r>
+              <a:rPr sz="2000" b="0">
+                <a:solidFill>
+                  <a:srgbClr val="333333"/>
+                </a:solidFill>
+                <a:latin typeface="Calibri"/>
+              </a:rPr>
+              <a:t>Structured datasets follow a fixed schema: rows and columns with consistent types</a:t>
+            </a:r>
+          </a:p>
+          <a:p>
+            <a:pPr>
               <a:spcAft>
                 <a:spcPts val="1000"/>
               </a:spcAft>
-            </a:pPr>
-            <a:r>
-              <a:rPr sz="2000" b="0">
-                <a:solidFill>
-                  <a:srgbClr val="333333"/>
-                </a:solidFill>
-                <a:latin typeface="Calibri"/>
-              </a:rPr>
-              <a:t>• Fixed schema: rows and columns, consistent types</a:t>
-            </a:r>
-          </a:p>
-          <a:p>
-            <a:pPr>
+              <a:buChar char="•"/>
               <a:lnSpc>
                 <a:spcPts val="2200"/>
               </a:lnSpc>
+            </a:pPr>
+            <a:r>
+              <a:rPr sz="2000" b="0">
+                <a:solidFill>
+                  <a:srgbClr val="333333"/>
+                </a:solidFill>
+                <a:latin typeface="Calibri"/>
+              </a:rPr>
+              <a:t>They live comfortably in spreadsheets and relational databases and are generally the</a:t>
+            </a:r>
+          </a:p>
+          <a:p>
+            <a:pPr>
               <a:spcAft>
                 <a:spcPts val="1000"/>
               </a:spcAft>
-            </a:pPr>
-            <a:r>
-              <a:rPr sz="2000" b="0">
-                <a:solidFill>
-                  <a:srgbClr val="333333"/>
-                </a:solidFill>
-                <a:latin typeface="Calibri"/>
-              </a:rPr>
-              <a:t>• Common stores: spreadsheets, relational tables, CSV</a:t>
-            </a:r>
-          </a:p>
-          <a:p>
-            <a:pPr>
+              <a:buChar char="•"/>
               <a:lnSpc>
                 <a:spcPts val="2200"/>
               </a:lnSpc>
-              <a:spcAft>
-                <a:spcPts val="1000"/>
-              </a:spcAft>
             </a:pPr>
             <a:r>
               <a:rPr sz="2000" b="0">
@@ -4240,26 +4669,7 @@
                 </a:solidFill>
                 <a:latin typeface="Calibri"/>
               </a:rPr>
-              <a:t>• Easy to filter, join, and aggregate</a:t>
-            </a:r>
-          </a:p>
-          <a:p>
-            <a:pPr>
-              <a:lnSpc>
-                <a:spcPts val="2200"/>
-              </a:lnSpc>
-              <a:spcAft>
-                <a:spcPts val="1000"/>
-              </a:spcAft>
-            </a:pPr>
-            <a:r>
-              <a:rPr sz="2000" b="0">
-                <a:solidFill>
-                  <a:srgbClr val="333333"/>
-                </a:solidFill>
-                <a:latin typeface="Calibri"/>
-              </a:rPr>
-              <a:t>• Example: customer table (ID, Name, Email, …)</a:t>
+              <a:t>A retail customer table</a:t>
             </a:r>
           </a:p>
         </p:txBody>
@@ -4298,7 +4708,7 @@
               </a:defRPr>
             </a:pPr>
             <a:r>
-              <a:t>Chapter 1 — Types Of Datasets</a:t>
+              <a:t>Chapter 1 — 02 Types Of Datasets</a:t>
             </a:r>
           </a:p>
         </p:txBody>
@@ -4383,69 +4793,73 @@
           <a:lstStyle/>
           <a:p>
             <a:pPr>
+              <a:spcAft>
+                <a:spcPts val="1000"/>
+              </a:spcAft>
+              <a:buChar char="•"/>
               <a:lnSpc>
                 <a:spcPts val="2200"/>
               </a:lnSpc>
+            </a:pPr>
+            <a:r>
+              <a:rPr sz="2000" b="0">
+                <a:solidFill>
+                  <a:srgbClr val="333333"/>
+                </a:solidFill>
+                <a:latin typeface="Calibri"/>
+              </a:rPr>
+              <a:t>Unstructured data has no predefined row–column model</a:t>
+            </a:r>
+          </a:p>
+          <a:p>
+            <a:pPr>
               <a:spcAft>
                 <a:spcPts val="1000"/>
               </a:spcAft>
-            </a:pPr>
-            <a:r>
-              <a:rPr sz="2000" b="0">
-                <a:solidFill>
-                  <a:srgbClr val="333333"/>
-                </a:solidFill>
-                <a:latin typeface="Calibri"/>
-              </a:rPr>
-              <a:t>• No fixed row–column schema</a:t>
-            </a:r>
-          </a:p>
-          <a:p>
-            <a:pPr>
+              <a:buChar char="•"/>
               <a:lnSpc>
                 <a:spcPts val="2200"/>
               </a:lnSpc>
+            </a:pPr>
+            <a:r>
+              <a:rPr sz="2000" b="0">
+                <a:solidFill>
+                  <a:srgbClr val="333333"/>
+                </a:solidFill>
+                <a:latin typeface="Calibri"/>
+              </a:rPr>
+              <a:t>Text, images, audio, and video fall here</a:t>
+            </a:r>
+          </a:p>
+          <a:p>
+            <a:pPr>
               <a:spcAft>
                 <a:spcPts val="1000"/>
               </a:spcAft>
-            </a:pPr>
-            <a:r>
-              <a:rPr sz="2000" b="0">
-                <a:solidFill>
-                  <a:srgbClr val="333333"/>
-                </a:solidFill>
-                <a:latin typeface="Calibri"/>
-              </a:rPr>
-              <a:t>• Text, images, audio, video</a:t>
-            </a:r>
-          </a:p>
-          <a:p>
-            <a:pPr>
+              <a:buChar char="•"/>
               <a:lnSpc>
                 <a:spcPts val="2200"/>
               </a:lnSpc>
+            </a:pPr>
+            <a:r>
+              <a:rPr sz="2000" b="0">
+                <a:solidFill>
+                  <a:srgbClr val="333333"/>
+                </a:solidFill>
+                <a:latin typeface="Calibri"/>
+              </a:rPr>
+              <a:t>Valuable insights often require NLP or image recognition rather than a simple SQL filter</a:t>
+            </a:r>
+          </a:p>
+          <a:p>
+            <a:pPr>
               <a:spcAft>
                 <a:spcPts val="1000"/>
               </a:spcAft>
-            </a:pPr>
-            <a:r>
-              <a:rPr sz="2000" b="0">
-                <a:solidFill>
-                  <a:srgbClr val="333333"/>
-                </a:solidFill>
-                <a:latin typeface="Calibri"/>
-              </a:rPr>
-              <a:t>• Insights often need NLP or computer vision</a:t>
-            </a:r>
-          </a:p>
-          <a:p>
-            <a:pPr>
+              <a:buChar char="•"/>
               <a:lnSpc>
                 <a:spcPts val="2200"/>
               </a:lnSpc>
-              <a:spcAft>
-                <a:spcPts val="1000"/>
-              </a:spcAft>
             </a:pPr>
             <a:r>
               <a:rPr sz="2000" b="0">
@@ -4454,7 +4868,7 @@
                 </a:solidFill>
                 <a:latin typeface="Calibri"/>
               </a:rPr>
-              <a:t>• Example: social posts, X-rays, voice recordings</a:t>
+              <a:t>Social media feedback and medical images are common examples</a:t>
             </a:r>
           </a:p>
         </p:txBody>
@@ -4493,7 +4907,7 @@
               </a:defRPr>
             </a:pPr>
             <a:r>
-              <a:t>Chapter 1 — Types Of Datasets</a:t>
+              <a:t>Chapter 1 — 02 Types Of Datasets</a:t>
             </a:r>
           </a:p>
         </p:txBody>
@@ -4563,15 +4977,13 @@
         </p:nvSpPr>
         <p:spPr>
           <a:xfrm>
-            <a:off x="548640" y="1051560"/>
-            <a:ext cx="11064240" cy="914400"/>
+            <a:off x="548640" y="1234440"/>
+            <a:ext cx="11064240" cy="4937760"/>
           </a:xfrm>
           <a:prstGeom prst="rect">
             <a:avLst/>
           </a:prstGeom>
-          <a:solidFill>
-            <a:srgbClr val="F4F4F4"/>
-          </a:solidFill>
+          <a:noFill/>
         </p:spPr>
         <p:txBody>
           <a:bodyPr wrap="square">
@@ -4580,21 +4992,62 @@
           <a:lstStyle/>
           <a:p>
             <a:pPr>
+              <a:spcAft>
+                <a:spcPts val="1000"/>
+              </a:spcAft>
+              <a:buChar char="•"/>
               <a:lnSpc>
                 <a:spcPts val="2200"/>
               </a:lnSpc>
+            </a:pPr>
+            <a:r>
+              <a:rPr sz="2000" b="0">
+                <a:solidFill>
+                  <a:srgbClr val="333333"/>
+                </a:solidFill>
+                <a:latin typeface="Calibri"/>
+              </a:rPr>
+              <a:t>Semi-structured data uses tags or keys</a:t>
+            </a:r>
+          </a:p>
+          <a:p>
+            <a:pPr>
               <a:spcAft>
-                <a:spcPts val="200"/>
+                <a:spcPts val="1000"/>
               </a:spcAft>
+              <a:buChar char="•"/>
+              <a:lnSpc>
+                <a:spcPts val="2200"/>
+              </a:lnSpc>
             </a:pPr>
             <a:r>
               <a:rPr sz="2000" b="0">
                 <a:solidFill>
                   <a:srgbClr val="333333"/>
                 </a:solidFill>
-                <a:latin typeface="Consolas"/>
+                <a:latin typeface="Calibri"/>
               </a:rPr>
-              <a:t>$ cd modules/chapter1/example7/ &amp;&amp; bash run.sh</a:t>
+              <a:t>Example 1.7 shows JSON objects where optional fields appear when relevant</a:t>
+            </a:r>
+          </a:p>
+          <a:p>
+            <a:pPr>
+              <a:spcAft>
+                <a:spcPts val="1000"/>
+              </a:spcAft>
+              <a:buChar char="•"/>
+              <a:lnSpc>
+                <a:spcPts val="2200"/>
+              </a:lnSpc>
+            </a:pPr>
+            <a:r>
+              <a:rPr sz="2000" b="0">
+                <a:solidFill>
+                  <a:srgbClr val="333333"/>
+                </a:solidFill>
+                <a:latin typeface="Calibri"/>
+              </a:rPr>
+              <a:t>Open the example 7 module to inspect a concrete sample</a:t>
             </a:r>
           </a:p>
         </p:txBody>
@@ -4633,7 +5086,7 @@
               </a:defRPr>
             </a:pPr>
             <a:r>
-              <a:t>Chapter 1 — Types Of Datasets</a:t>
+              <a:t>Chapter 1 — 02 Types Of Datasets</a:t>
             </a:r>
           </a:p>
         </p:txBody>
@@ -4718,105 +5171,73 @@
           <a:lstStyle/>
           <a:p>
             <a:pPr>
+              <a:spcAft>
+                <a:spcPts val="1000"/>
+              </a:spcAft>
+              <a:buChar char="•"/>
               <a:lnSpc>
                 <a:spcPts val="2200"/>
               </a:lnSpc>
+            </a:pPr>
+            <a:r>
+              <a:rPr sz="2000" b="0">
+                <a:solidFill>
+                  <a:srgbClr val="333333"/>
+                </a:solidFill>
+                <a:latin typeface="Calibri"/>
+              </a:rPr>
+              <a:t>Static datasets change rarely, an archived extract</a:t>
+            </a:r>
+          </a:p>
+          <a:p>
+            <a:pPr>
               <a:spcAft>
                 <a:spcPts val="1000"/>
               </a:spcAft>
-            </a:pPr>
-            <a:r>
-              <a:rPr sz="2000" b="0">
-                <a:solidFill>
-                  <a:srgbClr val="333333"/>
-                </a:solidFill>
-                <a:latin typeface="Calibri"/>
-              </a:rPr>
-              <a:t>• </a:t>
-            </a:r>
-            <a:r>
-              <a:rPr sz="2000" b="1">
-                <a:solidFill>
-                  <a:srgbClr val="333333"/>
-                </a:solidFill>
-                <a:latin typeface="Calibri"/>
-              </a:rPr>
-              <a:t>Static:</a:t>
-            </a:r>
-            <a:r>
-              <a:rPr sz="2000" b="0">
-                <a:solidFill>
-                  <a:srgbClr val="333333"/>
-                </a:solidFill>
-                <a:latin typeface="Calibri"/>
-              </a:rPr>
-              <a:t> snapshot that changes rarely (archive census</a:t>
-            </a:r>
-          </a:p>
-          <a:p>
-            <a:pPr>
+              <a:buChar char="•"/>
               <a:lnSpc>
                 <a:spcPts val="2200"/>
               </a:lnSpc>
+            </a:pPr>
+            <a:r>
+              <a:rPr sz="2000" b="0">
+                <a:solidFill>
+                  <a:srgbClr val="333333"/>
+                </a:solidFill>
+                <a:latin typeface="Calibri"/>
+              </a:rPr>
+              <a:t>Dynamic datasets update continuously, sensor streams or click logs</a:t>
+            </a:r>
+          </a:p>
+          <a:p>
+            <a:pPr>
               <a:spcAft>
                 <a:spcPts val="1000"/>
               </a:spcAft>
-            </a:pPr>
-            <a:r>
-              <a:rPr sz="2000" b="0">
-                <a:solidFill>
-                  <a:srgbClr val="333333"/>
-                </a:solidFill>
-                <a:latin typeface="Calibri"/>
-              </a:rPr>
-              <a:t>      extract)</a:t>
-            </a:r>
-          </a:p>
-          <a:p>
-            <a:pPr>
+              <a:buChar char="•"/>
               <a:lnSpc>
                 <a:spcPts val="2200"/>
               </a:lnSpc>
+            </a:pPr>
+            <a:r>
+              <a:rPr sz="2000" b="0">
+                <a:solidFill>
+                  <a:srgbClr val="333333"/>
+                </a:solidFill>
+                <a:latin typeface="Calibri"/>
+              </a:rPr>
+              <a:t>The same entity can move between forms over its lifecycle</a:t>
+            </a:r>
+          </a:p>
+          <a:p>
+            <a:pPr>
               <a:spcAft>
                 <a:spcPts val="1000"/>
               </a:spcAft>
-            </a:pPr>
-            <a:r>
-              <a:rPr sz="2000" b="0">
-                <a:solidFill>
-                  <a:srgbClr val="333333"/>
-                </a:solidFill>
-                <a:latin typeface="Calibri"/>
-              </a:rPr>
-              <a:t>• </a:t>
-            </a:r>
-            <a:r>
-              <a:rPr sz="2000" b="1">
-                <a:solidFill>
-                  <a:srgbClr val="333333"/>
-                </a:solidFill>
-                <a:latin typeface="Calibri"/>
-              </a:rPr>
-              <a:t>Dynamic:</a:t>
-            </a:r>
-            <a:r>
-              <a:rPr sz="2000" b="0">
-                <a:solidFill>
-                  <a:srgbClr val="333333"/>
-                </a:solidFill>
-                <a:latin typeface="Calibri"/>
-              </a:rPr>
-              <a:t> updates continuously (sensor streams, click</a:t>
-            </a:r>
-          </a:p>
-          <a:p>
-            <a:pPr>
+              <a:buChar char="•"/>
               <a:lnSpc>
                 <a:spcPts val="2200"/>
               </a:lnSpc>
-              <a:spcAft>
-                <a:spcPts val="1000"/>
-              </a:spcAft>
             </a:pPr>
             <a:r>
               <a:rPr sz="2000" b="0">
@@ -4825,83 +5246,7 @@
                 </a:solidFill>
                 <a:latin typeface="Calibri"/>
               </a:rPr>
-              <a:t>      logs)</a:t>
-            </a:r>
-          </a:p>
-          <a:p>
-            <a:pPr>
-              <a:lnSpc>
-                <a:spcPts val="2200"/>
-              </a:lnSpc>
-              <a:spcAft>
-                <a:spcPts val="1000"/>
-              </a:spcAft>
-            </a:pPr>
-            <a:r>
-              <a:rPr sz="2000" b="0">
-                <a:solidFill>
-                  <a:srgbClr val="333333"/>
-                </a:solidFill>
-                <a:latin typeface="Calibri"/>
-              </a:rPr>
-              <a:t>• Same entity can appear in both forms over its</a:t>
-            </a:r>
-          </a:p>
-          <a:p>
-            <a:pPr>
-              <a:lnSpc>
-                <a:spcPts val="2200"/>
-              </a:lnSpc>
-              <a:spcAft>
-                <a:spcPts val="1000"/>
-              </a:spcAft>
-            </a:pPr>
-            <a:r>
-              <a:rPr sz="2000" b="0">
-                <a:solidFill>
-                  <a:srgbClr val="333333"/>
-                </a:solidFill>
-                <a:latin typeface="Calibri"/>
-              </a:rPr>
-              <a:t>      lifecycle</a:t>
-            </a:r>
-          </a:p>
-          <a:p>
-            <a:pPr>
-              <a:lnSpc>
-                <a:spcPts val="2200"/>
-              </a:lnSpc>
-              <a:spcAft>
-                <a:spcPts val="1000"/>
-              </a:spcAft>
-            </a:pPr>
-            <a:r>
-              <a:rPr sz="2000" b="0">
-                <a:solidFill>
-                  <a:srgbClr val="333333"/>
-                </a:solidFill>
-                <a:latin typeface="Calibri"/>
-              </a:rPr>
-              <a:t>• Temporal behavior drives refresh, versioning, and</a:t>
-            </a:r>
-          </a:p>
-          <a:p>
-            <a:pPr>
-              <a:lnSpc>
-                <a:spcPts val="2200"/>
-              </a:lnSpc>
-              <a:spcAft>
-                <a:spcPts val="1000"/>
-              </a:spcAft>
-            </a:pPr>
-            <a:r>
-              <a:rPr sz="2000" b="0">
-                <a:solidFill>
-                  <a:srgbClr val="333333"/>
-                </a:solidFill>
-                <a:latin typeface="Calibri"/>
-              </a:rPr>
-              <a:t>      monitoring needs</a:t>
+              <a:t>Temporal behavior shapes how often you refresh, version, and monitor the data</a:t>
             </a:r>
           </a:p>
         </p:txBody>
@@ -4940,7 +5285,7 @@
               </a:defRPr>
             </a:pPr>
             <a:r>
-              <a:t>Chapter 1 — Types Of Datasets</a:t>
+              <a:t>Chapter 1 — 02 Types Of Datasets</a:t>
             </a:r>
           </a:p>
         </p:txBody>
@@ -5025,31 +5370,33 @@
           <a:lstStyle/>
           <a:p>
             <a:pPr>
+              <a:spcAft>
+                <a:spcPts val="1000"/>
+              </a:spcAft>
+              <a:buChar char="•"/>
               <a:lnSpc>
                 <a:spcPts val="2200"/>
               </a:lnSpc>
+            </a:pPr>
+            <a:r>
+              <a:rPr sz="2000" b="0">
+                <a:solidFill>
+                  <a:srgbClr val="333333"/>
+                </a:solidFill>
+                <a:latin typeface="Calibri"/>
+              </a:rPr>
+              <a:t>Structure and time are independent</a:t>
+            </a:r>
+          </a:p>
+          <a:p>
+            <a:pPr>
               <a:spcAft>
                 <a:spcPts val="1000"/>
               </a:spcAft>
-            </a:pPr>
-            <a:r>
-              <a:rPr sz="2000" b="0">
-                <a:solidFill>
-                  <a:srgbClr val="333333"/>
-                </a:solidFill>
-                <a:latin typeface="Calibri"/>
-              </a:rPr>
-              <a:t>• Structure and time are independent axes</a:t>
-            </a:r>
-          </a:p>
-          <a:p>
-            <a:pPr>
+              <a:buChar char="•"/>
               <a:lnSpc>
                 <a:spcPts val="2200"/>
               </a:lnSpc>
-              <a:spcAft>
-                <a:spcPts val="1000"/>
-              </a:spcAft>
             </a:pPr>
             <a:r>
               <a:rPr sz="2000" b="0">
@@ -5058,64 +5405,7 @@
                 </a:solidFill>
                 <a:latin typeface="Calibri"/>
               </a:rPr>
-              <a:t>• Structured data is easiest to query; unstructured</a:t>
-            </a:r>
-          </a:p>
-          <a:p>
-            <a:pPr>
-              <a:lnSpc>
-                <a:spcPts val="2200"/>
-              </a:lnSpc>
-              <a:spcAft>
-                <a:spcPts val="1000"/>
-              </a:spcAft>
-            </a:pPr>
-            <a:r>
-              <a:rPr sz="2000" b="0">
-                <a:solidFill>
-                  <a:srgbClr val="333333"/>
-                </a:solidFill>
-                <a:latin typeface="Calibri"/>
-              </a:rPr>
-              <a:t>      needs extraction</a:t>
-            </a:r>
-          </a:p>
-          <a:p>
-            <a:pPr>
-              <a:lnSpc>
-                <a:spcPts val="2200"/>
-              </a:lnSpc>
-              <a:spcAft>
-                <a:spcPts val="1000"/>
-              </a:spcAft>
-            </a:pPr>
-            <a:r>
-              <a:rPr sz="2000" b="0">
-                <a:solidFill>
-                  <a:srgbClr val="333333"/>
-                </a:solidFill>
-                <a:latin typeface="Calibri"/>
-              </a:rPr>
-              <a:t>• Semi-structured sits between: flexible keys, still</a:t>
-            </a:r>
-          </a:p>
-          <a:p>
-            <a:pPr>
-              <a:lnSpc>
-                <a:spcPts val="2200"/>
-              </a:lnSpc>
-              <a:spcAft>
-                <a:spcPts val="1000"/>
-              </a:spcAft>
-            </a:pPr>
-            <a:r>
-              <a:rPr sz="2000" b="0">
-                <a:solidFill>
-                  <a:srgbClr val="333333"/>
-                </a:solidFill>
-                <a:latin typeface="Calibri"/>
-              </a:rPr>
-              <a:t>      machine-readable</a:t>
+              <a:t>Structured data is easiest to query</a:t>
             </a:r>
           </a:p>
         </p:txBody>
@@ -5154,7 +5444,166 @@
               </a:defRPr>
             </a:pPr>
             <a:r>
-              <a:t>Chapter 1 — Types Of Datasets</a:t>
+              <a:t>Chapter 1 — 02 Types Of Datasets</a:t>
+            </a:r>
+          </a:p>
+        </p:txBody>
+      </p:sp>
+    </p:spTree>
+  </p:cSld>
+  <p:clrMapOvr>
+    <a:masterClrMapping/>
+  </p:clrMapOvr>
+</p:sld>
+</file>
+
+<file path=ppt/slides/slide9.xml><?xml version="1.0" encoding="utf-8"?>
+<p:sld xmlns:a="http://schemas.openxmlformats.org/drawingml/2006/main" xmlns:p="http://schemas.openxmlformats.org/presentationml/2006/main" xmlns:r="http://schemas.openxmlformats.org/officeDocument/2006/relationships">
+  <p:cSld>
+    <p:spTree>
+      <p:nvGrpSpPr>
+        <p:cNvPr id="1" name=""/>
+        <p:cNvGrpSpPr/>
+        <p:nvPr/>
+      </p:nvGrpSpPr>
+      <p:grpSpPr/>
+      <p:sp>
+        <p:nvSpPr>
+          <p:cNvPr id="2" name="TextBox 1"/>
+          <p:cNvSpPr txBox="1"/>
+          <p:nvPr/>
+        </p:nvSpPr>
+        <p:spPr>
+          <a:xfrm>
+            <a:off x="548640" y="411480"/>
+            <a:ext cx="11064240" cy="777240"/>
+          </a:xfrm>
+          <a:prstGeom prst="rect">
+            <a:avLst/>
+          </a:prstGeom>
+          <a:noFill/>
+        </p:spPr>
+        <p:txBody>
+          <a:bodyPr wrap="square">
+            <a:noAutofit/>
+          </a:bodyPr>
+          <a:lstStyle/>
+          <a:p>
+            <a:pPr>
+              <a:lnSpc>
+                <a:spcPts val="2200"/>
+              </a:lnSpc>
+            </a:pPr>
+            <a:r>
+              <a:rPr sz="2800" b="1">
+                <a:solidFill>
+                  <a:srgbClr val="1A1A2E"/>
+                </a:solidFill>
+                <a:latin typeface="Calibri"/>
+              </a:rPr>
+              <a:t>Next</a:t>
+            </a:r>
+          </a:p>
+        </p:txBody>
+      </p:sp>
+      <p:sp>
+        <p:nvSpPr>
+          <p:cNvPr id="3" name="TextBox 2"/>
+          <p:cNvSpPr txBox="1"/>
+          <p:nvPr/>
+        </p:nvSpPr>
+        <p:spPr>
+          <a:xfrm>
+            <a:off x="548640" y="1234440"/>
+            <a:ext cx="11064240" cy="4937760"/>
+          </a:xfrm>
+          <a:prstGeom prst="rect">
+            <a:avLst/>
+          </a:prstGeom>
+          <a:noFill/>
+        </p:spPr>
+        <p:txBody>
+          <a:bodyPr wrap="square">
+            <a:noAutofit/>
+          </a:bodyPr>
+          <a:lstStyle/>
+          <a:p>
+            <a:pPr>
+              <a:spcAft>
+                <a:spcPts val="1000"/>
+              </a:spcAft>
+              <a:buChar char="•"/>
+              <a:lnSpc>
+                <a:spcPts val="2200"/>
+              </a:lnSpc>
+            </a:pPr>
+            <a:r>
+              <a:rPr sz="2000" b="0">
+                <a:solidFill>
+                  <a:srgbClr val="333333"/>
+                </a:solidFill>
+                <a:latin typeface="Calibri"/>
+              </a:rPr>
+              <a:t>Complete the quiz for this clip</a:t>
+            </a:r>
+          </a:p>
+          <a:p>
+            <a:pPr>
+              <a:spcAft>
+                <a:spcPts val="1000"/>
+              </a:spcAft>
+              <a:buChar char="•"/>
+              <a:lnSpc>
+                <a:spcPts val="2200"/>
+              </a:lnSpc>
+            </a:pPr>
+            <a:r>
+              <a:rPr sz="2000" b="0">
+                <a:solidFill>
+                  <a:srgbClr val="333333"/>
+                </a:solidFill>
+                <a:latin typeface="Calibri"/>
+              </a:rPr>
+              <a:t>Complete the quiz, then continue to dataset formats, how these types are stored on disk</a:t>
+            </a:r>
+          </a:p>
+        </p:txBody>
+      </p:sp>
+      <p:sp>
+        <p:nvSpPr>
+          <p:cNvPr id="4" name="TextBox 3"/>
+          <p:cNvSpPr txBox="1"/>
+          <p:nvPr/>
+        </p:nvSpPr>
+        <p:spPr>
+          <a:xfrm>
+            <a:off x="548640" y="6355080"/>
+            <a:ext cx="11064240" cy="320040"/>
+          </a:xfrm>
+          <a:prstGeom prst="rect">
+            <a:avLst/>
+          </a:prstGeom>
+          <a:noFill/>
+        </p:spPr>
+        <p:txBody>
+          <a:bodyPr wrap="square">
+            <a:noAutofit/>
+          </a:bodyPr>
+          <a:lstStyle/>
+          <a:p>
+            <a:pPr algn="r">
+              <a:lnSpc>
+                <a:spcPts val="2200"/>
+              </a:lnSpc>
+              <a:defRPr sz="1000" b="0">
+                <a:solidFill>
+                  <a:srgbClr val="666666"/>
+                </a:solidFill>
+                <a:latin typeface="Calibri"/>
+              </a:defRPr>
+            </a:pPr>
+            <a:r>
+              <a:t>Chapter 1 — 02 Types Of Datasets</a:t>
             </a:r>
           </a:p>
         </p:txBody>
